--- a/assets/readme/examples/master-showcase.pptx
+++ b/assets/readme/examples/master-showcase.pptx
@@ -5015,33 +5015,2292 @@
           </a:p>
         </p:txBody>
       </p:sp>
-      <p:pic>
-        <p:nvPicPr>
-          <p:cNvPr name="Picture 30" id="30"/>
-          <p:cNvPicPr>
-            <a:picLocks noChangeAspect="true"/>
-          </p:cNvPicPr>
-          <p:nvPr/>
-        </p:nvPicPr>
-        <p:blipFill>
-          <a:blip r:embed="rId3"/>
-          <a:stretch>
-            <a:fillRect/>
-          </a:stretch>
-        </p:blipFill>
+      <p:sp>
+        <p:nvSpPr>
+          <p:cNvPr name="Freeform 30" id="30"/>
+          <p:cNvSpPr/>
+          <p:nvPr/>
+        </p:nvSpPr>
         <p:spPr>
           <a:xfrm>
             <a:off x="5695400" y="3255328"/>
             <a:ext cx="1346200" cy="1346200"/>
           </a:xfrm>
-          <a:prstGeom prst="rect">
-            <a:avLst/>
-          </a:prstGeom>
-        </p:spPr>
-      </p:pic>
-      <p:sp>
-        <p:nvSpPr>
-          <p:cNvPr name="GraphCompose Text Line" id="31"/>
+          <a:custGeom>
+            <a:avLst/>
+            <a:gdLst/>
+            <a:ahLst/>
+            <a:cxnLst/>
+            <a:rect r="r" b="b" t="t" l="l"/>
+            <a:pathLst>
+              <a:path h="1346200" w="1346200">
+                <a:moveTo>
+                  <a:pt x="0" y="0"/>
+                </a:moveTo>
+                <a:lnTo>
+                  <a:pt x="1346200" y="0"/>
+                </a:lnTo>
+                <a:lnTo>
+                  <a:pt x="1346200" y="1346200"/>
+                </a:lnTo>
+                <a:lnTo>
+                  <a:pt x="0" y="1346200"/>
+                </a:lnTo>
+                <a:close/>
+              </a:path>
+            </a:pathLst>
+          </a:custGeom>
+          <a:solidFill>
+            <a:srgbClr val="E8F4F5"/>
+          </a:solidFill>
+          <a:ln>
+            <a:noFill/>
+          </a:ln>
+        </p:spPr>
+      </p:sp>
+      <p:sp>
+        <p:nvSpPr>
+          <p:cNvPr name="Freeform 31" id="31"/>
+          <p:cNvSpPr/>
+          <p:nvPr/>
+        </p:nvSpPr>
+        <p:spPr>
+          <a:xfrm>
+            <a:off x="5816050" y="3375978"/>
+            <a:ext cx="1104900" cy="1104900"/>
+          </a:xfrm>
+          <a:custGeom>
+            <a:avLst/>
+            <a:gdLst/>
+            <a:ahLst/>
+            <a:cxnLst/>
+            <a:rect r="r" b="b" t="t" l="l"/>
+            <a:pathLst>
+              <a:path h="1104900" w="1104900">
+                <a:moveTo>
+                  <a:pt x="0" y="0"/>
+                </a:moveTo>
+                <a:lnTo>
+                  <a:pt x="266700" y="0"/>
+                </a:lnTo>
+                <a:lnTo>
+                  <a:pt x="266700" y="38100"/>
+                </a:lnTo>
+                <a:lnTo>
+                  <a:pt x="0" y="38100"/>
+                </a:lnTo>
+                <a:close/>
+                <a:moveTo>
+                  <a:pt x="381000" y="0"/>
+                </a:moveTo>
+                <a:lnTo>
+                  <a:pt x="419100" y="0"/>
+                </a:lnTo>
+                <a:lnTo>
+                  <a:pt x="419100" y="76200"/>
+                </a:lnTo>
+                <a:lnTo>
+                  <a:pt x="381000" y="76200"/>
+                </a:lnTo>
+                <a:close/>
+                <a:moveTo>
+                  <a:pt x="457200" y="0"/>
+                </a:moveTo>
+                <a:lnTo>
+                  <a:pt x="495300" y="0"/>
+                </a:lnTo>
+                <a:lnTo>
+                  <a:pt x="495300" y="38100"/>
+                </a:lnTo>
+                <a:lnTo>
+                  <a:pt x="457200" y="38100"/>
+                </a:lnTo>
+                <a:close/>
+                <a:moveTo>
+                  <a:pt x="533400" y="0"/>
+                </a:moveTo>
+                <a:lnTo>
+                  <a:pt x="571500" y="0"/>
+                </a:lnTo>
+                <a:lnTo>
+                  <a:pt x="571500" y="38100"/>
+                </a:lnTo>
+                <a:lnTo>
+                  <a:pt x="533400" y="38100"/>
+                </a:lnTo>
+                <a:close/>
+                <a:moveTo>
+                  <a:pt x="609600" y="0"/>
+                </a:moveTo>
+                <a:lnTo>
+                  <a:pt x="647700" y="0"/>
+                </a:lnTo>
+                <a:lnTo>
+                  <a:pt x="647700" y="38100"/>
+                </a:lnTo>
+                <a:lnTo>
+                  <a:pt x="609600" y="38100"/>
+                </a:lnTo>
+                <a:close/>
+                <a:moveTo>
+                  <a:pt x="762000" y="0"/>
+                </a:moveTo>
+                <a:lnTo>
+                  <a:pt x="800100" y="0"/>
+                </a:lnTo>
+                <a:lnTo>
+                  <a:pt x="800100" y="38100"/>
+                </a:lnTo>
+                <a:lnTo>
+                  <a:pt x="762000" y="38100"/>
+                </a:lnTo>
+                <a:close/>
+                <a:moveTo>
+                  <a:pt x="838200" y="0"/>
+                </a:moveTo>
+                <a:lnTo>
+                  <a:pt x="1104900" y="0"/>
+                </a:lnTo>
+                <a:lnTo>
+                  <a:pt x="1104900" y="38100"/>
+                </a:lnTo>
+                <a:lnTo>
+                  <a:pt x="838200" y="38100"/>
+                </a:lnTo>
+                <a:close/>
+                <a:moveTo>
+                  <a:pt x="0" y="38100"/>
+                </a:moveTo>
+                <a:lnTo>
+                  <a:pt x="38100" y="38100"/>
+                </a:lnTo>
+                <a:lnTo>
+                  <a:pt x="38100" y="228600"/>
+                </a:lnTo>
+                <a:lnTo>
+                  <a:pt x="0" y="228600"/>
+                </a:lnTo>
+                <a:close/>
+                <a:moveTo>
+                  <a:pt x="228600" y="38100"/>
+                </a:moveTo>
+                <a:lnTo>
+                  <a:pt x="266700" y="38100"/>
+                </a:lnTo>
+                <a:lnTo>
+                  <a:pt x="266700" y="228600"/>
+                </a:lnTo>
+                <a:lnTo>
+                  <a:pt x="228600" y="228600"/>
+                </a:lnTo>
+                <a:close/>
+                <a:moveTo>
+                  <a:pt x="304800" y="38100"/>
+                </a:moveTo>
+                <a:lnTo>
+                  <a:pt x="342900" y="38100"/>
+                </a:lnTo>
+                <a:lnTo>
+                  <a:pt x="342900" y="76200"/>
+                </a:lnTo>
+                <a:lnTo>
+                  <a:pt x="304800" y="76200"/>
+                </a:lnTo>
+                <a:close/>
+                <a:moveTo>
+                  <a:pt x="495300" y="38100"/>
+                </a:moveTo>
+                <a:lnTo>
+                  <a:pt x="571500" y="38100"/>
+                </a:lnTo>
+                <a:lnTo>
+                  <a:pt x="571500" y="76200"/>
+                </a:lnTo>
+                <a:lnTo>
+                  <a:pt x="495300" y="76200"/>
+                </a:lnTo>
+                <a:close/>
+                <a:moveTo>
+                  <a:pt x="647700" y="38100"/>
+                </a:moveTo>
+                <a:lnTo>
+                  <a:pt x="685800" y="38100"/>
+                </a:lnTo>
+                <a:lnTo>
+                  <a:pt x="685800" y="76200"/>
+                </a:lnTo>
+                <a:lnTo>
+                  <a:pt x="647700" y="76200"/>
+                </a:lnTo>
+                <a:close/>
+                <a:moveTo>
+                  <a:pt x="838200" y="38100"/>
+                </a:moveTo>
+                <a:lnTo>
+                  <a:pt x="876300" y="38100"/>
+                </a:lnTo>
+                <a:lnTo>
+                  <a:pt x="876300" y="228600"/>
+                </a:lnTo>
+                <a:lnTo>
+                  <a:pt x="838200" y="228600"/>
+                </a:lnTo>
+                <a:close/>
+                <a:moveTo>
+                  <a:pt x="1066800" y="38100"/>
+                </a:moveTo>
+                <a:lnTo>
+                  <a:pt x="1104900" y="38100"/>
+                </a:lnTo>
+                <a:lnTo>
+                  <a:pt x="1104900" y="228600"/>
+                </a:lnTo>
+                <a:lnTo>
+                  <a:pt x="1066800" y="228600"/>
+                </a:lnTo>
+                <a:close/>
+                <a:moveTo>
+                  <a:pt x="76200" y="76200"/>
+                </a:moveTo>
+                <a:lnTo>
+                  <a:pt x="190500" y="76200"/>
+                </a:lnTo>
+                <a:lnTo>
+                  <a:pt x="190500" y="190500"/>
+                </a:lnTo>
+                <a:lnTo>
+                  <a:pt x="76200" y="190500"/>
+                </a:lnTo>
+                <a:close/>
+                <a:moveTo>
+                  <a:pt x="457200" y="76200"/>
+                </a:moveTo>
+                <a:lnTo>
+                  <a:pt x="533400" y="76200"/>
+                </a:lnTo>
+                <a:lnTo>
+                  <a:pt x="533400" y="114300"/>
+                </a:lnTo>
+                <a:lnTo>
+                  <a:pt x="457200" y="114300"/>
+                </a:lnTo>
+                <a:close/>
+                <a:moveTo>
+                  <a:pt x="609600" y="76200"/>
+                </a:moveTo>
+                <a:lnTo>
+                  <a:pt x="800100" y="76200"/>
+                </a:lnTo>
+                <a:lnTo>
+                  <a:pt x="800100" y="114300"/>
+                </a:lnTo>
+                <a:lnTo>
+                  <a:pt x="609600" y="114300"/>
+                </a:lnTo>
+                <a:close/>
+                <a:moveTo>
+                  <a:pt x="914400" y="76200"/>
+                </a:moveTo>
+                <a:lnTo>
+                  <a:pt x="1028700" y="76200"/>
+                </a:lnTo>
+                <a:lnTo>
+                  <a:pt x="1028700" y="190500"/>
+                </a:lnTo>
+                <a:lnTo>
+                  <a:pt x="914400" y="190500"/>
+                </a:lnTo>
+                <a:close/>
+                <a:moveTo>
+                  <a:pt x="304800" y="114300"/>
+                </a:moveTo>
+                <a:lnTo>
+                  <a:pt x="419100" y="114300"/>
+                </a:lnTo>
+                <a:lnTo>
+                  <a:pt x="419100" y="152400"/>
+                </a:lnTo>
+                <a:lnTo>
+                  <a:pt x="304800" y="152400"/>
+                </a:lnTo>
+                <a:close/>
+                <a:moveTo>
+                  <a:pt x="457200" y="114300"/>
+                </a:moveTo>
+                <a:lnTo>
+                  <a:pt x="495300" y="114300"/>
+                </a:lnTo>
+                <a:lnTo>
+                  <a:pt x="495300" y="152400"/>
+                </a:lnTo>
+                <a:lnTo>
+                  <a:pt x="457200" y="152400"/>
+                </a:lnTo>
+                <a:close/>
+                <a:moveTo>
+                  <a:pt x="533400" y="114300"/>
+                </a:moveTo>
+                <a:lnTo>
+                  <a:pt x="647700" y="114300"/>
+                </a:lnTo>
+                <a:lnTo>
+                  <a:pt x="647700" y="152400"/>
+                </a:lnTo>
+                <a:lnTo>
+                  <a:pt x="533400" y="152400"/>
+                </a:lnTo>
+                <a:close/>
+                <a:moveTo>
+                  <a:pt x="342900" y="152400"/>
+                </a:moveTo>
+                <a:lnTo>
+                  <a:pt x="381000" y="152400"/>
+                </a:lnTo>
+                <a:lnTo>
+                  <a:pt x="381000" y="190500"/>
+                </a:lnTo>
+                <a:lnTo>
+                  <a:pt x="342900" y="190500"/>
+                </a:lnTo>
+                <a:close/>
+                <a:moveTo>
+                  <a:pt x="533400" y="152400"/>
+                </a:moveTo>
+                <a:lnTo>
+                  <a:pt x="571500" y="152400"/>
+                </a:lnTo>
+                <a:lnTo>
+                  <a:pt x="571500" y="190500"/>
+                </a:lnTo>
+                <a:lnTo>
+                  <a:pt x="533400" y="190500"/>
+                </a:lnTo>
+                <a:close/>
+                <a:moveTo>
+                  <a:pt x="762000" y="152400"/>
+                </a:moveTo>
+                <a:lnTo>
+                  <a:pt x="800100" y="152400"/>
+                </a:lnTo>
+                <a:lnTo>
+                  <a:pt x="800100" y="190500"/>
+                </a:lnTo>
+                <a:lnTo>
+                  <a:pt x="762000" y="190500"/>
+                </a:lnTo>
+                <a:close/>
+                <a:moveTo>
+                  <a:pt x="304800" y="190500"/>
+                </a:moveTo>
+                <a:lnTo>
+                  <a:pt x="381000" y="190500"/>
+                </a:lnTo>
+                <a:lnTo>
+                  <a:pt x="381000" y="228600"/>
+                </a:lnTo>
+                <a:lnTo>
+                  <a:pt x="304800" y="228600"/>
+                </a:lnTo>
+                <a:close/>
+                <a:moveTo>
+                  <a:pt x="419100" y="190500"/>
+                </a:moveTo>
+                <a:lnTo>
+                  <a:pt x="609600" y="190500"/>
+                </a:lnTo>
+                <a:lnTo>
+                  <a:pt x="609600" y="228600"/>
+                </a:lnTo>
+                <a:lnTo>
+                  <a:pt x="419100" y="228600"/>
+                </a:lnTo>
+                <a:close/>
+                <a:moveTo>
+                  <a:pt x="647700" y="190500"/>
+                </a:moveTo>
+                <a:lnTo>
+                  <a:pt x="685800" y="190500"/>
+                </a:lnTo>
+                <a:lnTo>
+                  <a:pt x="685800" y="228600"/>
+                </a:lnTo>
+                <a:lnTo>
+                  <a:pt x="647700" y="228600"/>
+                </a:lnTo>
+                <a:close/>
+                <a:moveTo>
+                  <a:pt x="0" y="228600"/>
+                </a:moveTo>
+                <a:lnTo>
+                  <a:pt x="266700" y="228600"/>
+                </a:lnTo>
+                <a:lnTo>
+                  <a:pt x="266700" y="266700"/>
+                </a:lnTo>
+                <a:lnTo>
+                  <a:pt x="0" y="266700"/>
+                </a:lnTo>
+                <a:close/>
+                <a:moveTo>
+                  <a:pt x="304800" y="228600"/>
+                </a:moveTo>
+                <a:lnTo>
+                  <a:pt x="342900" y="228600"/>
+                </a:lnTo>
+                <a:lnTo>
+                  <a:pt x="342900" y="266700"/>
+                </a:lnTo>
+                <a:lnTo>
+                  <a:pt x="304800" y="266700"/>
+                </a:lnTo>
+                <a:close/>
+                <a:moveTo>
+                  <a:pt x="381000" y="228600"/>
+                </a:moveTo>
+                <a:lnTo>
+                  <a:pt x="419100" y="228600"/>
+                </a:lnTo>
+                <a:lnTo>
+                  <a:pt x="419100" y="266700"/>
+                </a:lnTo>
+                <a:lnTo>
+                  <a:pt x="381000" y="266700"/>
+                </a:lnTo>
+                <a:close/>
+                <a:moveTo>
+                  <a:pt x="457200" y="228600"/>
+                </a:moveTo>
+                <a:lnTo>
+                  <a:pt x="495300" y="228600"/>
+                </a:lnTo>
+                <a:lnTo>
+                  <a:pt x="495300" y="266700"/>
+                </a:lnTo>
+                <a:lnTo>
+                  <a:pt x="457200" y="266700"/>
+                </a:lnTo>
+                <a:close/>
+                <a:moveTo>
+                  <a:pt x="533400" y="228600"/>
+                </a:moveTo>
+                <a:lnTo>
+                  <a:pt x="571500" y="228600"/>
+                </a:lnTo>
+                <a:lnTo>
+                  <a:pt x="571500" y="266700"/>
+                </a:lnTo>
+                <a:lnTo>
+                  <a:pt x="533400" y="266700"/>
+                </a:lnTo>
+                <a:close/>
+                <a:moveTo>
+                  <a:pt x="609600" y="228600"/>
+                </a:moveTo>
+                <a:lnTo>
+                  <a:pt x="647700" y="228600"/>
+                </a:lnTo>
+                <a:lnTo>
+                  <a:pt x="647700" y="266700"/>
+                </a:lnTo>
+                <a:lnTo>
+                  <a:pt x="609600" y="266700"/>
+                </a:lnTo>
+                <a:close/>
+                <a:moveTo>
+                  <a:pt x="685800" y="228600"/>
+                </a:moveTo>
+                <a:lnTo>
+                  <a:pt x="723900" y="228600"/>
+                </a:lnTo>
+                <a:lnTo>
+                  <a:pt x="723900" y="304800"/>
+                </a:lnTo>
+                <a:lnTo>
+                  <a:pt x="685800" y="304800"/>
+                </a:lnTo>
+                <a:close/>
+                <a:moveTo>
+                  <a:pt x="762000" y="228600"/>
+                </a:moveTo>
+                <a:lnTo>
+                  <a:pt x="800100" y="228600"/>
+                </a:lnTo>
+                <a:lnTo>
+                  <a:pt x="800100" y="304800"/>
+                </a:lnTo>
+                <a:lnTo>
+                  <a:pt x="762000" y="304800"/>
+                </a:lnTo>
+                <a:close/>
+                <a:moveTo>
+                  <a:pt x="838200" y="228600"/>
+                </a:moveTo>
+                <a:lnTo>
+                  <a:pt x="1104900" y="228600"/>
+                </a:lnTo>
+                <a:lnTo>
+                  <a:pt x="1104900" y="266700"/>
+                </a:lnTo>
+                <a:lnTo>
+                  <a:pt x="838200" y="266700"/>
+                </a:lnTo>
+                <a:close/>
+                <a:moveTo>
+                  <a:pt x="342900" y="266700"/>
+                </a:moveTo>
+                <a:lnTo>
+                  <a:pt x="457200" y="266700"/>
+                </a:lnTo>
+                <a:lnTo>
+                  <a:pt x="457200" y="304800"/>
+                </a:lnTo>
+                <a:lnTo>
+                  <a:pt x="342900" y="304800"/>
+                </a:lnTo>
+                <a:close/>
+                <a:moveTo>
+                  <a:pt x="533400" y="266700"/>
+                </a:moveTo>
+                <a:lnTo>
+                  <a:pt x="647700" y="266700"/>
+                </a:lnTo>
+                <a:lnTo>
+                  <a:pt x="647700" y="304800"/>
+                </a:lnTo>
+                <a:lnTo>
+                  <a:pt x="533400" y="304800"/>
+                </a:lnTo>
+                <a:close/>
+                <a:moveTo>
+                  <a:pt x="0" y="304800"/>
+                </a:moveTo>
+                <a:lnTo>
+                  <a:pt x="190500" y="304800"/>
+                </a:lnTo>
+                <a:lnTo>
+                  <a:pt x="190500" y="342900"/>
+                </a:lnTo>
+                <a:lnTo>
+                  <a:pt x="0" y="342900"/>
+                </a:lnTo>
+                <a:close/>
+                <a:moveTo>
+                  <a:pt x="228600" y="304800"/>
+                </a:moveTo>
+                <a:lnTo>
+                  <a:pt x="381000" y="304800"/>
+                </a:lnTo>
+                <a:lnTo>
+                  <a:pt x="381000" y="342900"/>
+                </a:lnTo>
+                <a:lnTo>
+                  <a:pt x="228600" y="342900"/>
+                </a:lnTo>
+                <a:close/>
+                <a:moveTo>
+                  <a:pt x="419100" y="304800"/>
+                </a:moveTo>
+                <a:lnTo>
+                  <a:pt x="457200" y="304800"/>
+                </a:lnTo>
+                <a:lnTo>
+                  <a:pt x="457200" y="342900"/>
+                </a:lnTo>
+                <a:lnTo>
+                  <a:pt x="419100" y="342900"/>
+                </a:lnTo>
+                <a:close/>
+                <a:moveTo>
+                  <a:pt x="571500" y="304800"/>
+                </a:moveTo>
+                <a:lnTo>
+                  <a:pt x="609600" y="304800"/>
+                </a:lnTo>
+                <a:lnTo>
+                  <a:pt x="609600" y="381000"/>
+                </a:lnTo>
+                <a:lnTo>
+                  <a:pt x="571500" y="381000"/>
+                </a:lnTo>
+                <a:close/>
+                <a:moveTo>
+                  <a:pt x="647700" y="304800"/>
+                </a:moveTo>
+                <a:lnTo>
+                  <a:pt x="723900" y="304800"/>
+                </a:lnTo>
+                <a:lnTo>
+                  <a:pt x="723900" y="342900"/>
+                </a:lnTo>
+                <a:lnTo>
+                  <a:pt x="647700" y="342900"/>
+                </a:lnTo>
+                <a:close/>
+                <a:moveTo>
+                  <a:pt x="762000" y="304800"/>
+                </a:moveTo>
+                <a:lnTo>
+                  <a:pt x="838200" y="304800"/>
+                </a:lnTo>
+                <a:lnTo>
+                  <a:pt x="838200" y="342900"/>
+                </a:lnTo>
+                <a:lnTo>
+                  <a:pt x="762000" y="342900"/>
+                </a:lnTo>
+                <a:close/>
+                <a:moveTo>
+                  <a:pt x="876300" y="304800"/>
+                </a:moveTo>
+                <a:lnTo>
+                  <a:pt x="914400" y="304800"/>
+                </a:lnTo>
+                <a:lnTo>
+                  <a:pt x="914400" y="342900"/>
+                </a:lnTo>
+                <a:lnTo>
+                  <a:pt x="876300" y="342900"/>
+                </a:lnTo>
+                <a:close/>
+                <a:moveTo>
+                  <a:pt x="952500" y="304800"/>
+                </a:moveTo>
+                <a:lnTo>
+                  <a:pt x="990600" y="304800"/>
+                </a:lnTo>
+                <a:lnTo>
+                  <a:pt x="990600" y="342900"/>
+                </a:lnTo>
+                <a:lnTo>
+                  <a:pt x="952500" y="342900"/>
+                </a:lnTo>
+                <a:close/>
+                <a:moveTo>
+                  <a:pt x="1028700" y="304800"/>
+                </a:moveTo>
+                <a:lnTo>
+                  <a:pt x="1066800" y="304800"/>
+                </a:lnTo>
+                <a:lnTo>
+                  <a:pt x="1066800" y="381000"/>
+                </a:lnTo>
+                <a:lnTo>
+                  <a:pt x="1028700" y="381000"/>
+                </a:lnTo>
+                <a:close/>
+                <a:moveTo>
+                  <a:pt x="0" y="342900"/>
+                </a:moveTo>
+                <a:lnTo>
+                  <a:pt x="38100" y="342900"/>
+                </a:lnTo>
+                <a:lnTo>
+                  <a:pt x="38100" y="381000"/>
+                </a:lnTo>
+                <a:lnTo>
+                  <a:pt x="0" y="381000"/>
+                </a:lnTo>
+                <a:close/>
+                <a:moveTo>
+                  <a:pt x="152400" y="342900"/>
+                </a:moveTo>
+                <a:lnTo>
+                  <a:pt x="228600" y="342900"/>
+                </a:lnTo>
+                <a:lnTo>
+                  <a:pt x="228600" y="381000"/>
+                </a:lnTo>
+                <a:lnTo>
+                  <a:pt x="152400" y="381000"/>
+                </a:lnTo>
+                <a:close/>
+                <a:moveTo>
+                  <a:pt x="381000" y="342900"/>
+                </a:moveTo>
+                <a:lnTo>
+                  <a:pt x="419100" y="342900"/>
+                </a:lnTo>
+                <a:lnTo>
+                  <a:pt x="419100" y="419100"/>
+                </a:lnTo>
+                <a:lnTo>
+                  <a:pt x="381000" y="419100"/>
+                </a:lnTo>
+                <a:close/>
+                <a:moveTo>
+                  <a:pt x="457200" y="342900"/>
+                </a:moveTo>
+                <a:lnTo>
+                  <a:pt x="495300" y="342900"/>
+                </a:lnTo>
+                <a:lnTo>
+                  <a:pt x="495300" y="381000"/>
+                </a:lnTo>
+                <a:lnTo>
+                  <a:pt x="457200" y="381000"/>
+                </a:lnTo>
+                <a:close/>
+                <a:moveTo>
+                  <a:pt x="723900" y="342900"/>
+                </a:moveTo>
+                <a:lnTo>
+                  <a:pt x="838200" y="342900"/>
+                </a:lnTo>
+                <a:lnTo>
+                  <a:pt x="838200" y="381000"/>
+                </a:lnTo>
+                <a:lnTo>
+                  <a:pt x="723900" y="381000"/>
+                </a:lnTo>
+                <a:close/>
+                <a:moveTo>
+                  <a:pt x="876300" y="342900"/>
+                </a:moveTo>
+                <a:lnTo>
+                  <a:pt x="990600" y="342900"/>
+                </a:lnTo>
+                <a:lnTo>
+                  <a:pt x="990600" y="381000"/>
+                </a:lnTo>
+                <a:lnTo>
+                  <a:pt x="876300" y="381000"/>
+                </a:lnTo>
+                <a:close/>
+                <a:moveTo>
+                  <a:pt x="38100" y="381000"/>
+                </a:moveTo>
+                <a:lnTo>
+                  <a:pt x="76200" y="381000"/>
+                </a:lnTo>
+                <a:lnTo>
+                  <a:pt x="76200" y="419100"/>
+                </a:lnTo>
+                <a:lnTo>
+                  <a:pt x="38100" y="419100"/>
+                </a:lnTo>
+                <a:close/>
+                <a:moveTo>
+                  <a:pt x="152400" y="381000"/>
+                </a:moveTo>
+                <a:lnTo>
+                  <a:pt x="190500" y="381000"/>
+                </a:lnTo>
+                <a:lnTo>
+                  <a:pt x="190500" y="419100"/>
+                </a:lnTo>
+                <a:lnTo>
+                  <a:pt x="152400" y="419100"/>
+                </a:lnTo>
+                <a:close/>
+                <a:moveTo>
+                  <a:pt x="228600" y="381000"/>
+                </a:moveTo>
+                <a:lnTo>
+                  <a:pt x="266700" y="381000"/>
+                </a:lnTo>
+                <a:lnTo>
+                  <a:pt x="266700" y="419100"/>
+                </a:lnTo>
+                <a:lnTo>
+                  <a:pt x="228600" y="419100"/>
+                </a:lnTo>
+                <a:close/>
+                <a:moveTo>
+                  <a:pt x="495300" y="381000"/>
+                </a:moveTo>
+                <a:lnTo>
+                  <a:pt x="571500" y="381000"/>
+                </a:lnTo>
+                <a:lnTo>
+                  <a:pt x="571500" y="419100"/>
+                </a:lnTo>
+                <a:lnTo>
+                  <a:pt x="495300" y="419100"/>
+                </a:lnTo>
+                <a:close/>
+                <a:moveTo>
+                  <a:pt x="647700" y="381000"/>
+                </a:moveTo>
+                <a:lnTo>
+                  <a:pt x="685800" y="381000"/>
+                </a:lnTo>
+                <a:lnTo>
+                  <a:pt x="685800" y="419100"/>
+                </a:lnTo>
+                <a:lnTo>
+                  <a:pt x="647700" y="419100"/>
+                </a:lnTo>
+                <a:close/>
+                <a:moveTo>
+                  <a:pt x="723900" y="381000"/>
+                </a:moveTo>
+                <a:lnTo>
+                  <a:pt x="762000" y="381000"/>
+                </a:lnTo>
+                <a:lnTo>
+                  <a:pt x="762000" y="419100"/>
+                </a:lnTo>
+                <a:lnTo>
+                  <a:pt x="723900" y="419100"/>
+                </a:lnTo>
+                <a:close/>
+                <a:moveTo>
+                  <a:pt x="876300" y="381000"/>
+                </a:moveTo>
+                <a:lnTo>
+                  <a:pt x="914400" y="381000"/>
+                </a:lnTo>
+                <a:lnTo>
+                  <a:pt x="914400" y="419100"/>
+                </a:lnTo>
+                <a:lnTo>
+                  <a:pt x="876300" y="419100"/>
+                </a:lnTo>
+                <a:close/>
+                <a:moveTo>
+                  <a:pt x="952500" y="381000"/>
+                </a:moveTo>
+                <a:lnTo>
+                  <a:pt x="1028700" y="381000"/>
+                </a:lnTo>
+                <a:lnTo>
+                  <a:pt x="1028700" y="419100"/>
+                </a:lnTo>
+                <a:lnTo>
+                  <a:pt x="952500" y="419100"/>
+                </a:lnTo>
+                <a:close/>
+                <a:moveTo>
+                  <a:pt x="38100" y="419100"/>
+                </a:moveTo>
+                <a:lnTo>
+                  <a:pt x="152400" y="419100"/>
+                </a:lnTo>
+                <a:lnTo>
+                  <a:pt x="152400" y="457200"/>
+                </a:lnTo>
+                <a:lnTo>
+                  <a:pt x="38100" y="457200"/>
+                </a:lnTo>
+                <a:close/>
+                <a:moveTo>
+                  <a:pt x="304800" y="419100"/>
+                </a:moveTo>
+                <a:lnTo>
+                  <a:pt x="342900" y="419100"/>
+                </a:lnTo>
+                <a:lnTo>
+                  <a:pt x="342900" y="457200"/>
+                </a:lnTo>
+                <a:lnTo>
+                  <a:pt x="304800" y="457200"/>
+                </a:lnTo>
+                <a:close/>
+                <a:moveTo>
+                  <a:pt x="457200" y="419100"/>
+                </a:moveTo>
+                <a:lnTo>
+                  <a:pt x="533400" y="419100"/>
+                </a:lnTo>
+                <a:lnTo>
+                  <a:pt x="533400" y="457200"/>
+                </a:lnTo>
+                <a:lnTo>
+                  <a:pt x="457200" y="457200"/>
+                </a:lnTo>
+                <a:close/>
+                <a:moveTo>
+                  <a:pt x="609600" y="419100"/>
+                </a:moveTo>
+                <a:lnTo>
+                  <a:pt x="762000" y="419100"/>
+                </a:lnTo>
+                <a:lnTo>
+                  <a:pt x="762000" y="457200"/>
+                </a:lnTo>
+                <a:lnTo>
+                  <a:pt x="609600" y="457200"/>
+                </a:lnTo>
+                <a:close/>
+                <a:moveTo>
+                  <a:pt x="800100" y="419100"/>
+                </a:moveTo>
+                <a:lnTo>
+                  <a:pt x="990600" y="419100"/>
+                </a:lnTo>
+                <a:lnTo>
+                  <a:pt x="990600" y="457200"/>
+                </a:lnTo>
+                <a:lnTo>
+                  <a:pt x="800100" y="457200"/>
+                </a:lnTo>
+                <a:close/>
+                <a:moveTo>
+                  <a:pt x="1066800" y="419100"/>
+                </a:moveTo>
+                <a:lnTo>
+                  <a:pt x="1104900" y="419100"/>
+                </a:lnTo>
+                <a:lnTo>
+                  <a:pt x="1104900" y="457200"/>
+                </a:lnTo>
+                <a:lnTo>
+                  <a:pt x="1066800" y="457200"/>
+                </a:lnTo>
+                <a:close/>
+                <a:moveTo>
+                  <a:pt x="76200" y="457200"/>
+                </a:moveTo>
+                <a:lnTo>
+                  <a:pt x="114300" y="457200"/>
+                </a:lnTo>
+                <a:lnTo>
+                  <a:pt x="114300" y="495300"/>
+                </a:lnTo>
+                <a:lnTo>
+                  <a:pt x="76200" y="495300"/>
+                </a:lnTo>
+                <a:close/>
+                <a:moveTo>
+                  <a:pt x="152400" y="457200"/>
+                </a:moveTo>
+                <a:lnTo>
+                  <a:pt x="304800" y="457200"/>
+                </a:lnTo>
+                <a:lnTo>
+                  <a:pt x="304800" y="495300"/>
+                </a:lnTo>
+                <a:lnTo>
+                  <a:pt x="152400" y="495300"/>
+                </a:lnTo>
+                <a:close/>
+                <a:moveTo>
+                  <a:pt x="342900" y="457200"/>
+                </a:moveTo>
+                <a:lnTo>
+                  <a:pt x="419100" y="457200"/>
+                </a:lnTo>
+                <a:lnTo>
+                  <a:pt x="419100" y="495300"/>
+                </a:lnTo>
+                <a:lnTo>
+                  <a:pt x="342900" y="495300"/>
+                </a:lnTo>
+                <a:close/>
+                <a:moveTo>
+                  <a:pt x="457200" y="457200"/>
+                </a:moveTo>
+                <a:lnTo>
+                  <a:pt x="609600" y="457200"/>
+                </a:lnTo>
+                <a:lnTo>
+                  <a:pt x="609600" y="495300"/>
+                </a:lnTo>
+                <a:lnTo>
+                  <a:pt x="457200" y="495300"/>
+                </a:lnTo>
+                <a:close/>
+                <a:moveTo>
+                  <a:pt x="685800" y="457200"/>
+                </a:moveTo>
+                <a:lnTo>
+                  <a:pt x="723900" y="457200"/>
+                </a:lnTo>
+                <a:lnTo>
+                  <a:pt x="723900" y="533400"/>
+                </a:lnTo>
+                <a:lnTo>
+                  <a:pt x="685800" y="533400"/>
+                </a:lnTo>
+                <a:close/>
+                <a:moveTo>
+                  <a:pt x="762000" y="457200"/>
+                </a:moveTo>
+                <a:lnTo>
+                  <a:pt x="952500" y="457200"/>
+                </a:lnTo>
+                <a:lnTo>
+                  <a:pt x="952500" y="495300"/>
+                </a:lnTo>
+                <a:lnTo>
+                  <a:pt x="762000" y="495300"/>
+                </a:lnTo>
+                <a:close/>
+                <a:moveTo>
+                  <a:pt x="0" y="495300"/>
+                </a:moveTo>
+                <a:lnTo>
+                  <a:pt x="76200" y="495300"/>
+                </a:lnTo>
+                <a:lnTo>
+                  <a:pt x="76200" y="533400"/>
+                </a:lnTo>
+                <a:lnTo>
+                  <a:pt x="0" y="533400"/>
+                </a:lnTo>
+                <a:close/>
+                <a:moveTo>
+                  <a:pt x="533400" y="495300"/>
+                </a:moveTo>
+                <a:lnTo>
+                  <a:pt x="609600" y="495300"/>
+                </a:lnTo>
+                <a:lnTo>
+                  <a:pt x="609600" y="533400"/>
+                </a:lnTo>
+                <a:lnTo>
+                  <a:pt x="533400" y="533400"/>
+                </a:lnTo>
+                <a:close/>
+                <a:moveTo>
+                  <a:pt x="762000" y="495300"/>
+                </a:moveTo>
+                <a:lnTo>
+                  <a:pt x="838200" y="495300"/>
+                </a:lnTo>
+                <a:lnTo>
+                  <a:pt x="838200" y="533400"/>
+                </a:lnTo>
+                <a:lnTo>
+                  <a:pt x="762000" y="533400"/>
+                </a:lnTo>
+                <a:close/>
+                <a:moveTo>
+                  <a:pt x="952500" y="495300"/>
+                </a:moveTo>
+                <a:lnTo>
+                  <a:pt x="990600" y="495300"/>
+                </a:lnTo>
+                <a:lnTo>
+                  <a:pt x="990600" y="533400"/>
+                </a:lnTo>
+                <a:lnTo>
+                  <a:pt x="952500" y="533400"/>
+                </a:lnTo>
+                <a:close/>
+                <a:moveTo>
+                  <a:pt x="1028700" y="495300"/>
+                </a:moveTo>
+                <a:lnTo>
+                  <a:pt x="1066800" y="495300"/>
+                </a:lnTo>
+                <a:lnTo>
+                  <a:pt x="1066800" y="533400"/>
+                </a:lnTo>
+                <a:lnTo>
+                  <a:pt x="1028700" y="533400"/>
+                </a:lnTo>
+                <a:close/>
+                <a:moveTo>
+                  <a:pt x="76200" y="533400"/>
+                </a:moveTo>
+                <a:lnTo>
+                  <a:pt x="190500" y="533400"/>
+                </a:lnTo>
+                <a:lnTo>
+                  <a:pt x="190500" y="571500"/>
+                </a:lnTo>
+                <a:lnTo>
+                  <a:pt x="76200" y="571500"/>
+                </a:lnTo>
+                <a:close/>
+                <a:moveTo>
+                  <a:pt x="228600" y="533400"/>
+                </a:moveTo>
+                <a:lnTo>
+                  <a:pt x="381000" y="533400"/>
+                </a:lnTo>
+                <a:lnTo>
+                  <a:pt x="381000" y="571500"/>
+                </a:lnTo>
+                <a:lnTo>
+                  <a:pt x="228600" y="571500"/>
+                </a:lnTo>
+                <a:close/>
+                <a:moveTo>
+                  <a:pt x="419100" y="533400"/>
+                </a:moveTo>
+                <a:lnTo>
+                  <a:pt x="685800" y="533400"/>
+                </a:lnTo>
+                <a:lnTo>
+                  <a:pt x="685800" y="571500"/>
+                </a:lnTo>
+                <a:lnTo>
+                  <a:pt x="419100" y="571500"/>
+                </a:lnTo>
+                <a:close/>
+                <a:moveTo>
+                  <a:pt x="723900" y="533400"/>
+                </a:moveTo>
+                <a:lnTo>
+                  <a:pt x="762000" y="533400"/>
+                </a:lnTo>
+                <a:lnTo>
+                  <a:pt x="762000" y="571500"/>
+                </a:lnTo>
+                <a:lnTo>
+                  <a:pt x="723900" y="571500"/>
+                </a:lnTo>
+                <a:close/>
+                <a:moveTo>
+                  <a:pt x="952500" y="533400"/>
+                </a:moveTo>
+                <a:lnTo>
+                  <a:pt x="1104900" y="533400"/>
+                </a:lnTo>
+                <a:lnTo>
+                  <a:pt x="1104900" y="571500"/>
+                </a:lnTo>
+                <a:lnTo>
+                  <a:pt x="952500" y="571500"/>
+                </a:lnTo>
+                <a:close/>
+                <a:moveTo>
+                  <a:pt x="38100" y="571500"/>
+                </a:moveTo>
+                <a:lnTo>
+                  <a:pt x="152400" y="571500"/>
+                </a:lnTo>
+                <a:lnTo>
+                  <a:pt x="152400" y="609600"/>
+                </a:lnTo>
+                <a:lnTo>
+                  <a:pt x="38100" y="609600"/>
+                </a:lnTo>
+                <a:close/>
+                <a:moveTo>
+                  <a:pt x="190500" y="571500"/>
+                </a:moveTo>
+                <a:lnTo>
+                  <a:pt x="228600" y="571500"/>
+                </a:lnTo>
+                <a:lnTo>
+                  <a:pt x="228600" y="609600"/>
+                </a:lnTo>
+                <a:lnTo>
+                  <a:pt x="190500" y="609600"/>
+                </a:lnTo>
+                <a:close/>
+                <a:moveTo>
+                  <a:pt x="304800" y="571500"/>
+                </a:moveTo>
+                <a:lnTo>
+                  <a:pt x="457200" y="571500"/>
+                </a:lnTo>
+                <a:lnTo>
+                  <a:pt x="457200" y="609600"/>
+                </a:lnTo>
+                <a:lnTo>
+                  <a:pt x="304800" y="609600"/>
+                </a:lnTo>
+                <a:close/>
+                <a:moveTo>
+                  <a:pt x="533400" y="571500"/>
+                </a:moveTo>
+                <a:lnTo>
+                  <a:pt x="571500" y="571500"/>
+                </a:lnTo>
+                <a:lnTo>
+                  <a:pt x="571500" y="609600"/>
+                </a:lnTo>
+                <a:lnTo>
+                  <a:pt x="533400" y="609600"/>
+                </a:lnTo>
+                <a:close/>
+                <a:moveTo>
+                  <a:pt x="609600" y="571500"/>
+                </a:moveTo>
+                <a:lnTo>
+                  <a:pt x="647700" y="571500"/>
+                </a:lnTo>
+                <a:lnTo>
+                  <a:pt x="647700" y="609600"/>
+                </a:lnTo>
+                <a:lnTo>
+                  <a:pt x="609600" y="609600"/>
+                </a:lnTo>
+                <a:close/>
+                <a:moveTo>
+                  <a:pt x="685800" y="571500"/>
+                </a:moveTo>
+                <a:lnTo>
+                  <a:pt x="800100" y="571500"/>
+                </a:lnTo>
+                <a:lnTo>
+                  <a:pt x="800100" y="609600"/>
+                </a:lnTo>
+                <a:lnTo>
+                  <a:pt x="685800" y="609600"/>
+                </a:lnTo>
+                <a:close/>
+                <a:moveTo>
+                  <a:pt x="838200" y="571500"/>
+                </a:moveTo>
+                <a:lnTo>
+                  <a:pt x="952500" y="571500"/>
+                </a:lnTo>
+                <a:lnTo>
+                  <a:pt x="952500" y="609600"/>
+                </a:lnTo>
+                <a:lnTo>
+                  <a:pt x="838200" y="609600"/>
+                </a:lnTo>
+                <a:close/>
+                <a:moveTo>
+                  <a:pt x="1028700" y="571500"/>
+                </a:moveTo>
+                <a:lnTo>
+                  <a:pt x="1104900" y="571500"/>
+                </a:lnTo>
+                <a:lnTo>
+                  <a:pt x="1104900" y="609600"/>
+                </a:lnTo>
+                <a:lnTo>
+                  <a:pt x="1028700" y="609600"/>
+                </a:lnTo>
+                <a:close/>
+                <a:moveTo>
+                  <a:pt x="114300" y="609600"/>
+                </a:moveTo>
+                <a:lnTo>
+                  <a:pt x="152400" y="609600"/>
+                </a:lnTo>
+                <a:lnTo>
+                  <a:pt x="152400" y="647700"/>
+                </a:lnTo>
+                <a:lnTo>
+                  <a:pt x="114300" y="647700"/>
+                </a:lnTo>
+                <a:close/>
+                <a:moveTo>
+                  <a:pt x="190500" y="609600"/>
+                </a:moveTo>
+                <a:lnTo>
+                  <a:pt x="304800" y="609600"/>
+                </a:lnTo>
+                <a:lnTo>
+                  <a:pt x="304800" y="647700"/>
+                </a:lnTo>
+                <a:lnTo>
+                  <a:pt x="190500" y="647700"/>
+                </a:lnTo>
+                <a:close/>
+                <a:moveTo>
+                  <a:pt x="419100" y="609600"/>
+                </a:moveTo>
+                <a:lnTo>
+                  <a:pt x="457200" y="609600"/>
+                </a:lnTo>
+                <a:lnTo>
+                  <a:pt x="457200" y="647700"/>
+                </a:lnTo>
+                <a:lnTo>
+                  <a:pt x="419100" y="647700"/>
+                </a:lnTo>
+                <a:close/>
+                <a:moveTo>
+                  <a:pt x="495300" y="609600"/>
+                </a:moveTo>
+                <a:lnTo>
+                  <a:pt x="533400" y="609600"/>
+                </a:lnTo>
+                <a:lnTo>
+                  <a:pt x="533400" y="647700"/>
+                </a:lnTo>
+                <a:lnTo>
+                  <a:pt x="495300" y="647700"/>
+                </a:lnTo>
+                <a:close/>
+                <a:moveTo>
+                  <a:pt x="571500" y="609600"/>
+                </a:moveTo>
+                <a:lnTo>
+                  <a:pt x="647700" y="609600"/>
+                </a:lnTo>
+                <a:lnTo>
+                  <a:pt x="647700" y="647700"/>
+                </a:lnTo>
+                <a:lnTo>
+                  <a:pt x="571500" y="647700"/>
+                </a:lnTo>
+                <a:close/>
+                <a:moveTo>
+                  <a:pt x="685800" y="609600"/>
+                </a:moveTo>
+                <a:lnTo>
+                  <a:pt x="723900" y="609600"/>
+                </a:lnTo>
+                <a:lnTo>
+                  <a:pt x="723900" y="647700"/>
+                </a:lnTo>
+                <a:lnTo>
+                  <a:pt x="685800" y="647700"/>
+                </a:lnTo>
+                <a:close/>
+                <a:moveTo>
+                  <a:pt x="762000" y="609600"/>
+                </a:moveTo>
+                <a:lnTo>
+                  <a:pt x="800100" y="609600"/>
+                </a:lnTo>
+                <a:lnTo>
+                  <a:pt x="800100" y="647700"/>
+                </a:lnTo>
+                <a:lnTo>
+                  <a:pt x="762000" y="647700"/>
+                </a:lnTo>
+                <a:close/>
+                <a:moveTo>
+                  <a:pt x="876300" y="609600"/>
+                </a:moveTo>
+                <a:lnTo>
+                  <a:pt x="914400" y="609600"/>
+                </a:lnTo>
+                <a:lnTo>
+                  <a:pt x="914400" y="647700"/>
+                </a:lnTo>
+                <a:lnTo>
+                  <a:pt x="876300" y="647700"/>
+                </a:lnTo>
+                <a:close/>
+                <a:moveTo>
+                  <a:pt x="0" y="647700"/>
+                </a:moveTo>
+                <a:lnTo>
+                  <a:pt x="38100" y="647700"/>
+                </a:lnTo>
+                <a:lnTo>
+                  <a:pt x="38100" y="800100"/>
+                </a:lnTo>
+                <a:lnTo>
+                  <a:pt x="0" y="800100"/>
+                </a:lnTo>
+                <a:close/>
+                <a:moveTo>
+                  <a:pt x="114300" y="647700"/>
+                </a:moveTo>
+                <a:lnTo>
+                  <a:pt x="190500" y="647700"/>
+                </a:lnTo>
+                <a:lnTo>
+                  <a:pt x="190500" y="685800"/>
+                </a:lnTo>
+                <a:lnTo>
+                  <a:pt x="114300" y="685800"/>
+                </a:lnTo>
+                <a:close/>
+                <a:moveTo>
+                  <a:pt x="381000" y="647700"/>
+                </a:moveTo>
+                <a:lnTo>
+                  <a:pt x="419100" y="647700"/>
+                </a:lnTo>
+                <a:lnTo>
+                  <a:pt x="419100" y="685800"/>
+                </a:lnTo>
+                <a:lnTo>
+                  <a:pt x="381000" y="685800"/>
+                </a:lnTo>
+                <a:close/>
+                <a:moveTo>
+                  <a:pt x="457200" y="647700"/>
+                </a:moveTo>
+                <a:lnTo>
+                  <a:pt x="495300" y="647700"/>
+                </a:lnTo>
+                <a:lnTo>
+                  <a:pt x="495300" y="685800"/>
+                </a:lnTo>
+                <a:lnTo>
+                  <a:pt x="457200" y="685800"/>
+                </a:lnTo>
+                <a:close/>
+                <a:moveTo>
+                  <a:pt x="533400" y="647700"/>
+                </a:moveTo>
+                <a:lnTo>
+                  <a:pt x="609600" y="647700"/>
+                </a:lnTo>
+                <a:lnTo>
+                  <a:pt x="609600" y="685800"/>
+                </a:lnTo>
+                <a:lnTo>
+                  <a:pt x="533400" y="685800"/>
+                </a:lnTo>
+                <a:close/>
+                <a:moveTo>
+                  <a:pt x="723900" y="647700"/>
+                </a:moveTo>
+                <a:lnTo>
+                  <a:pt x="800100" y="647700"/>
+                </a:lnTo>
+                <a:lnTo>
+                  <a:pt x="800100" y="685800"/>
+                </a:lnTo>
+                <a:lnTo>
+                  <a:pt x="723900" y="685800"/>
+                </a:lnTo>
+                <a:close/>
+                <a:moveTo>
+                  <a:pt x="876300" y="647700"/>
+                </a:moveTo>
+                <a:lnTo>
+                  <a:pt x="990600" y="647700"/>
+                </a:lnTo>
+                <a:lnTo>
+                  <a:pt x="990600" y="685800"/>
+                </a:lnTo>
+                <a:lnTo>
+                  <a:pt x="876300" y="685800"/>
+                </a:lnTo>
+                <a:close/>
+                <a:moveTo>
+                  <a:pt x="1028700" y="647700"/>
+                </a:moveTo>
+                <a:lnTo>
+                  <a:pt x="1066800" y="647700"/>
+                </a:lnTo>
+                <a:lnTo>
+                  <a:pt x="1066800" y="685800"/>
+                </a:lnTo>
+                <a:lnTo>
+                  <a:pt x="1028700" y="685800"/>
+                </a:lnTo>
+                <a:close/>
+                <a:moveTo>
+                  <a:pt x="76200" y="685800"/>
+                </a:moveTo>
+                <a:lnTo>
+                  <a:pt x="114300" y="685800"/>
+                </a:lnTo>
+                <a:lnTo>
+                  <a:pt x="114300" y="723900"/>
+                </a:lnTo>
+                <a:lnTo>
+                  <a:pt x="76200" y="723900"/>
+                </a:lnTo>
+                <a:close/>
+                <a:moveTo>
+                  <a:pt x="152400" y="685800"/>
+                </a:moveTo>
+                <a:lnTo>
+                  <a:pt x="190500" y="685800"/>
+                </a:lnTo>
+                <a:lnTo>
+                  <a:pt x="190500" y="723900"/>
+                </a:lnTo>
+                <a:lnTo>
+                  <a:pt x="152400" y="723900"/>
+                </a:lnTo>
+                <a:close/>
+                <a:moveTo>
+                  <a:pt x="228600" y="685800"/>
+                </a:moveTo>
+                <a:lnTo>
+                  <a:pt x="266700" y="685800"/>
+                </a:lnTo>
+                <a:lnTo>
+                  <a:pt x="266700" y="723900"/>
+                </a:lnTo>
+                <a:lnTo>
+                  <a:pt x="228600" y="723900"/>
+                </a:lnTo>
+                <a:close/>
+                <a:moveTo>
+                  <a:pt x="304800" y="685800"/>
+                </a:moveTo>
+                <a:lnTo>
+                  <a:pt x="342900" y="685800"/>
+                </a:lnTo>
+                <a:lnTo>
+                  <a:pt x="342900" y="723900"/>
+                </a:lnTo>
+                <a:lnTo>
+                  <a:pt x="304800" y="723900"/>
+                </a:lnTo>
+                <a:close/>
+                <a:moveTo>
+                  <a:pt x="495300" y="685800"/>
+                </a:moveTo>
+                <a:lnTo>
+                  <a:pt x="609600" y="685800"/>
+                </a:lnTo>
+                <a:lnTo>
+                  <a:pt x="609600" y="723900"/>
+                </a:lnTo>
+                <a:lnTo>
+                  <a:pt x="495300" y="723900"/>
+                </a:lnTo>
+                <a:close/>
+                <a:moveTo>
+                  <a:pt x="723900" y="685800"/>
+                </a:moveTo>
+                <a:lnTo>
+                  <a:pt x="762000" y="685800"/>
+                </a:lnTo>
+                <a:lnTo>
+                  <a:pt x="762000" y="723900"/>
+                </a:lnTo>
+                <a:lnTo>
+                  <a:pt x="723900" y="723900"/>
+                </a:lnTo>
+                <a:close/>
+                <a:moveTo>
+                  <a:pt x="952500" y="685800"/>
+                </a:moveTo>
+                <a:lnTo>
+                  <a:pt x="1104900" y="685800"/>
+                </a:lnTo>
+                <a:lnTo>
+                  <a:pt x="1104900" y="723900"/>
+                </a:lnTo>
+                <a:lnTo>
+                  <a:pt x="952500" y="723900"/>
+                </a:lnTo>
+                <a:close/>
+                <a:moveTo>
+                  <a:pt x="76200" y="723900"/>
+                </a:moveTo>
+                <a:lnTo>
+                  <a:pt x="228600" y="723900"/>
+                </a:lnTo>
+                <a:lnTo>
+                  <a:pt x="228600" y="762000"/>
+                </a:lnTo>
+                <a:lnTo>
+                  <a:pt x="76200" y="762000"/>
+                </a:lnTo>
+                <a:close/>
+                <a:moveTo>
+                  <a:pt x="266700" y="723900"/>
+                </a:moveTo>
+                <a:lnTo>
+                  <a:pt x="342900" y="723900"/>
+                </a:lnTo>
+                <a:lnTo>
+                  <a:pt x="342900" y="762000"/>
+                </a:lnTo>
+                <a:lnTo>
+                  <a:pt x="266700" y="762000"/>
+                </a:lnTo>
+                <a:close/>
+                <a:moveTo>
+                  <a:pt x="457200" y="723900"/>
+                </a:moveTo>
+                <a:lnTo>
+                  <a:pt x="495300" y="723900"/>
+                </a:lnTo>
+                <a:lnTo>
+                  <a:pt x="495300" y="800100"/>
+                </a:lnTo>
+                <a:lnTo>
+                  <a:pt x="457200" y="800100"/>
+                </a:lnTo>
+                <a:close/>
+                <a:moveTo>
+                  <a:pt x="609600" y="723900"/>
+                </a:moveTo>
+                <a:lnTo>
+                  <a:pt x="647700" y="723900"/>
+                </a:lnTo>
+                <a:lnTo>
+                  <a:pt x="647700" y="762000"/>
+                </a:lnTo>
+                <a:lnTo>
+                  <a:pt x="609600" y="762000"/>
+                </a:lnTo>
+                <a:close/>
+                <a:moveTo>
+                  <a:pt x="685800" y="723900"/>
+                </a:moveTo>
+                <a:lnTo>
+                  <a:pt x="952500" y="723900"/>
+                </a:lnTo>
+                <a:lnTo>
+                  <a:pt x="952500" y="762000"/>
+                </a:lnTo>
+                <a:lnTo>
+                  <a:pt x="685800" y="762000"/>
+                </a:lnTo>
+                <a:close/>
+                <a:moveTo>
+                  <a:pt x="1028700" y="723900"/>
+                </a:moveTo>
+                <a:lnTo>
+                  <a:pt x="1104900" y="723900"/>
+                </a:lnTo>
+                <a:lnTo>
+                  <a:pt x="1104900" y="762000"/>
+                </a:lnTo>
+                <a:lnTo>
+                  <a:pt x="1028700" y="762000"/>
+                </a:lnTo>
+                <a:close/>
+                <a:moveTo>
+                  <a:pt x="76200" y="762000"/>
+                </a:moveTo>
+                <a:lnTo>
+                  <a:pt x="152400" y="762000"/>
+                </a:lnTo>
+                <a:lnTo>
+                  <a:pt x="152400" y="800100"/>
+                </a:lnTo>
+                <a:lnTo>
+                  <a:pt x="76200" y="800100"/>
+                </a:lnTo>
+                <a:close/>
+                <a:moveTo>
+                  <a:pt x="190500" y="762000"/>
+                </a:moveTo>
+                <a:lnTo>
+                  <a:pt x="342900" y="762000"/>
+                </a:lnTo>
+                <a:lnTo>
+                  <a:pt x="342900" y="800100"/>
+                </a:lnTo>
+                <a:lnTo>
+                  <a:pt x="190500" y="800100"/>
+                </a:lnTo>
+                <a:close/>
+                <a:moveTo>
+                  <a:pt x="533400" y="762000"/>
+                </a:moveTo>
+                <a:lnTo>
+                  <a:pt x="609600" y="762000"/>
+                </a:lnTo>
+                <a:lnTo>
+                  <a:pt x="609600" y="800100"/>
+                </a:lnTo>
+                <a:lnTo>
+                  <a:pt x="533400" y="800100"/>
+                </a:lnTo>
+                <a:close/>
+                <a:moveTo>
+                  <a:pt x="685800" y="762000"/>
+                </a:moveTo>
+                <a:lnTo>
+                  <a:pt x="723900" y="762000"/>
+                </a:lnTo>
+                <a:lnTo>
+                  <a:pt x="723900" y="800100"/>
+                </a:lnTo>
+                <a:lnTo>
+                  <a:pt x="685800" y="800100"/>
+                </a:lnTo>
+                <a:close/>
+                <a:moveTo>
+                  <a:pt x="762000" y="762000"/>
+                </a:moveTo>
+                <a:lnTo>
+                  <a:pt x="1066800" y="762000"/>
+                </a:lnTo>
+                <a:lnTo>
+                  <a:pt x="1066800" y="800100"/>
+                </a:lnTo>
+                <a:lnTo>
+                  <a:pt x="762000" y="800100"/>
+                </a:lnTo>
+                <a:close/>
+                <a:moveTo>
+                  <a:pt x="304800" y="800100"/>
+                </a:moveTo>
+                <a:lnTo>
+                  <a:pt x="419100" y="800100"/>
+                </a:lnTo>
+                <a:lnTo>
+                  <a:pt x="419100" y="838200"/>
+                </a:lnTo>
+                <a:lnTo>
+                  <a:pt x="304800" y="838200"/>
+                </a:lnTo>
+                <a:close/>
+                <a:moveTo>
+                  <a:pt x="533400" y="800100"/>
+                </a:moveTo>
+                <a:lnTo>
+                  <a:pt x="571500" y="800100"/>
+                </a:lnTo>
+                <a:lnTo>
+                  <a:pt x="571500" y="838200"/>
+                </a:lnTo>
+                <a:lnTo>
+                  <a:pt x="533400" y="838200"/>
+                </a:lnTo>
+                <a:close/>
+                <a:moveTo>
+                  <a:pt x="723900" y="800100"/>
+                </a:moveTo>
+                <a:lnTo>
+                  <a:pt x="800100" y="800100"/>
+                </a:lnTo>
+                <a:lnTo>
+                  <a:pt x="800100" y="876300"/>
+                </a:lnTo>
+                <a:lnTo>
+                  <a:pt x="723900" y="876300"/>
+                </a:lnTo>
+                <a:close/>
+                <a:moveTo>
+                  <a:pt x="914400" y="800100"/>
+                </a:moveTo>
+                <a:lnTo>
+                  <a:pt x="952500" y="800100"/>
+                </a:lnTo>
+                <a:lnTo>
+                  <a:pt x="952500" y="838200"/>
+                </a:lnTo>
+                <a:lnTo>
+                  <a:pt x="914400" y="838200"/>
+                </a:lnTo>
+                <a:close/>
+                <a:moveTo>
+                  <a:pt x="1028700" y="800100"/>
+                </a:moveTo>
+                <a:lnTo>
+                  <a:pt x="1066800" y="800100"/>
+                </a:lnTo>
+                <a:lnTo>
+                  <a:pt x="1066800" y="838200"/>
+                </a:lnTo>
+                <a:lnTo>
+                  <a:pt x="1028700" y="838200"/>
+                </a:lnTo>
+                <a:close/>
+                <a:moveTo>
+                  <a:pt x="0" y="838200"/>
+                </a:moveTo>
+                <a:lnTo>
+                  <a:pt x="266700" y="838200"/>
+                </a:lnTo>
+                <a:lnTo>
+                  <a:pt x="266700" y="876300"/>
+                </a:lnTo>
+                <a:lnTo>
+                  <a:pt x="0" y="876300"/>
+                </a:lnTo>
+                <a:close/>
+                <a:moveTo>
+                  <a:pt x="304800" y="838200"/>
+                </a:moveTo>
+                <a:lnTo>
+                  <a:pt x="342900" y="838200"/>
+                </a:lnTo>
+                <a:lnTo>
+                  <a:pt x="342900" y="876300"/>
+                </a:lnTo>
+                <a:lnTo>
+                  <a:pt x="304800" y="876300"/>
+                </a:lnTo>
+                <a:close/>
+                <a:moveTo>
+                  <a:pt x="419100" y="838200"/>
+                </a:moveTo>
+                <a:lnTo>
+                  <a:pt x="495300" y="838200"/>
+                </a:lnTo>
+                <a:lnTo>
+                  <a:pt x="495300" y="876300"/>
+                </a:lnTo>
+                <a:lnTo>
+                  <a:pt x="419100" y="876300"/>
+                </a:lnTo>
+                <a:close/>
+                <a:moveTo>
+                  <a:pt x="571500" y="838200"/>
+                </a:moveTo>
+                <a:lnTo>
+                  <a:pt x="647700" y="838200"/>
+                </a:lnTo>
+                <a:lnTo>
+                  <a:pt x="647700" y="876300"/>
+                </a:lnTo>
+                <a:lnTo>
+                  <a:pt x="571500" y="876300"/>
+                </a:lnTo>
+                <a:close/>
+                <a:moveTo>
+                  <a:pt x="838200" y="838200"/>
+                </a:moveTo>
+                <a:lnTo>
+                  <a:pt x="876300" y="838200"/>
+                </a:lnTo>
+                <a:lnTo>
+                  <a:pt x="876300" y="876300"/>
+                </a:lnTo>
+                <a:lnTo>
+                  <a:pt x="838200" y="876300"/>
+                </a:lnTo>
+                <a:close/>
+                <a:moveTo>
+                  <a:pt x="914400" y="838200"/>
+                </a:moveTo>
+                <a:lnTo>
+                  <a:pt x="1028700" y="838200"/>
+                </a:lnTo>
+                <a:lnTo>
+                  <a:pt x="1028700" y="876300"/>
+                </a:lnTo>
+                <a:lnTo>
+                  <a:pt x="914400" y="876300"/>
+                </a:lnTo>
+                <a:close/>
+                <a:moveTo>
+                  <a:pt x="0" y="876300"/>
+                </a:moveTo>
+                <a:lnTo>
+                  <a:pt x="38100" y="876300"/>
+                </a:lnTo>
+                <a:lnTo>
+                  <a:pt x="38100" y="1066800"/>
+                </a:lnTo>
+                <a:lnTo>
+                  <a:pt x="0" y="1066800"/>
+                </a:lnTo>
+                <a:close/>
+                <a:moveTo>
+                  <a:pt x="228600" y="876300"/>
+                </a:moveTo>
+                <a:lnTo>
+                  <a:pt x="266700" y="876300"/>
+                </a:lnTo>
+                <a:lnTo>
+                  <a:pt x="266700" y="1066800"/>
+                </a:lnTo>
+                <a:lnTo>
+                  <a:pt x="228600" y="1066800"/>
+                </a:lnTo>
+                <a:close/>
+                <a:moveTo>
+                  <a:pt x="342900" y="876300"/>
+                </a:moveTo>
+                <a:lnTo>
+                  <a:pt x="457200" y="876300"/>
+                </a:lnTo>
+                <a:lnTo>
+                  <a:pt x="457200" y="914400"/>
+                </a:lnTo>
+                <a:lnTo>
+                  <a:pt x="342900" y="914400"/>
+                </a:lnTo>
+                <a:close/>
+                <a:moveTo>
+                  <a:pt x="609600" y="876300"/>
+                </a:moveTo>
+                <a:lnTo>
+                  <a:pt x="647700" y="876300"/>
+                </a:lnTo>
+                <a:lnTo>
+                  <a:pt x="647700" y="914400"/>
+                </a:lnTo>
+                <a:lnTo>
+                  <a:pt x="609600" y="914400"/>
+                </a:lnTo>
+                <a:close/>
+                <a:moveTo>
+                  <a:pt x="762000" y="876300"/>
+                </a:moveTo>
+                <a:lnTo>
+                  <a:pt x="800100" y="876300"/>
+                </a:lnTo>
+                <a:lnTo>
+                  <a:pt x="800100" y="914400"/>
+                </a:lnTo>
+                <a:lnTo>
+                  <a:pt x="762000" y="914400"/>
+                </a:lnTo>
+                <a:close/>
+                <a:moveTo>
+                  <a:pt x="914400" y="876300"/>
+                </a:moveTo>
+                <a:lnTo>
+                  <a:pt x="952500" y="876300"/>
+                </a:lnTo>
+                <a:lnTo>
+                  <a:pt x="952500" y="914400"/>
+                </a:lnTo>
+                <a:lnTo>
+                  <a:pt x="914400" y="914400"/>
+                </a:lnTo>
+                <a:close/>
+                <a:moveTo>
+                  <a:pt x="990600" y="876300"/>
+                </a:moveTo>
+                <a:lnTo>
+                  <a:pt x="1104900" y="876300"/>
+                </a:lnTo>
+                <a:lnTo>
+                  <a:pt x="1104900" y="952500"/>
+                </a:lnTo>
+                <a:lnTo>
+                  <a:pt x="990600" y="952500"/>
+                </a:lnTo>
+                <a:close/>
+                <a:moveTo>
+                  <a:pt x="76200" y="914400"/>
+                </a:moveTo>
+                <a:lnTo>
+                  <a:pt x="190500" y="914400"/>
+                </a:lnTo>
+                <a:lnTo>
+                  <a:pt x="190500" y="1028700"/>
+                </a:lnTo>
+                <a:lnTo>
+                  <a:pt x="76200" y="1028700"/>
+                </a:lnTo>
+                <a:close/>
+                <a:moveTo>
+                  <a:pt x="304800" y="914400"/>
+                </a:moveTo>
+                <a:lnTo>
+                  <a:pt x="457200" y="914400"/>
+                </a:lnTo>
+                <a:lnTo>
+                  <a:pt x="457200" y="952500"/>
+                </a:lnTo>
+                <a:lnTo>
+                  <a:pt x="304800" y="952500"/>
+                </a:lnTo>
+                <a:close/>
+                <a:moveTo>
+                  <a:pt x="571500" y="914400"/>
+                </a:moveTo>
+                <a:lnTo>
+                  <a:pt x="685800" y="914400"/>
+                </a:lnTo>
+                <a:lnTo>
+                  <a:pt x="685800" y="952500"/>
+                </a:lnTo>
+                <a:lnTo>
+                  <a:pt x="571500" y="952500"/>
+                </a:lnTo>
+                <a:close/>
+                <a:moveTo>
+                  <a:pt x="762000" y="914400"/>
+                </a:moveTo>
+                <a:lnTo>
+                  <a:pt x="952500" y="914400"/>
+                </a:lnTo>
+                <a:lnTo>
+                  <a:pt x="952500" y="952500"/>
+                </a:lnTo>
+                <a:lnTo>
+                  <a:pt x="762000" y="952500"/>
+                </a:lnTo>
+                <a:close/>
+                <a:moveTo>
+                  <a:pt x="304800" y="952500"/>
+                </a:moveTo>
+                <a:lnTo>
+                  <a:pt x="381000" y="952500"/>
+                </a:lnTo>
+                <a:lnTo>
+                  <a:pt x="381000" y="990600"/>
+                </a:lnTo>
+                <a:lnTo>
+                  <a:pt x="304800" y="990600"/>
+                </a:lnTo>
+                <a:close/>
+                <a:moveTo>
+                  <a:pt x="457200" y="952500"/>
+                </a:moveTo>
+                <a:lnTo>
+                  <a:pt x="533400" y="952500"/>
+                </a:lnTo>
+                <a:lnTo>
+                  <a:pt x="533400" y="990600"/>
+                </a:lnTo>
+                <a:lnTo>
+                  <a:pt x="457200" y="990600"/>
+                </a:lnTo>
+                <a:close/>
+                <a:moveTo>
+                  <a:pt x="609600" y="952500"/>
+                </a:moveTo>
+                <a:lnTo>
+                  <a:pt x="647700" y="952500"/>
+                </a:lnTo>
+                <a:lnTo>
+                  <a:pt x="647700" y="990600"/>
+                </a:lnTo>
+                <a:lnTo>
+                  <a:pt x="609600" y="990600"/>
+                </a:lnTo>
+                <a:close/>
+                <a:moveTo>
+                  <a:pt x="685800" y="952500"/>
+                </a:moveTo>
+                <a:lnTo>
+                  <a:pt x="723900" y="952500"/>
+                </a:lnTo>
+                <a:lnTo>
+                  <a:pt x="723900" y="990600"/>
+                </a:lnTo>
+                <a:lnTo>
+                  <a:pt x="685800" y="990600"/>
+                </a:lnTo>
+                <a:close/>
+                <a:moveTo>
+                  <a:pt x="762000" y="952500"/>
+                </a:moveTo>
+                <a:lnTo>
+                  <a:pt x="838200" y="952500"/>
+                </a:lnTo>
+                <a:lnTo>
+                  <a:pt x="838200" y="990600"/>
+                </a:lnTo>
+                <a:lnTo>
+                  <a:pt x="762000" y="990600"/>
+                </a:lnTo>
+                <a:close/>
+                <a:moveTo>
+                  <a:pt x="876300" y="952500"/>
+                </a:moveTo>
+                <a:lnTo>
+                  <a:pt x="914400" y="952500"/>
+                </a:lnTo>
+                <a:lnTo>
+                  <a:pt x="914400" y="990600"/>
+                </a:lnTo>
+                <a:lnTo>
+                  <a:pt x="876300" y="990600"/>
+                </a:lnTo>
+                <a:close/>
+                <a:moveTo>
+                  <a:pt x="304800" y="990600"/>
+                </a:moveTo>
+                <a:lnTo>
+                  <a:pt x="342900" y="990600"/>
+                </a:lnTo>
+                <a:lnTo>
+                  <a:pt x="342900" y="1066800"/>
+                </a:lnTo>
+                <a:lnTo>
+                  <a:pt x="304800" y="1066800"/>
+                </a:lnTo>
+                <a:close/>
+                <a:moveTo>
+                  <a:pt x="381000" y="990600"/>
+                </a:moveTo>
+                <a:lnTo>
+                  <a:pt x="419100" y="990600"/>
+                </a:lnTo>
+                <a:lnTo>
+                  <a:pt x="419100" y="1028700"/>
+                </a:lnTo>
+                <a:lnTo>
+                  <a:pt x="381000" y="1028700"/>
+                </a:lnTo>
+                <a:close/>
+                <a:moveTo>
+                  <a:pt x="495300" y="990600"/>
+                </a:moveTo>
+                <a:lnTo>
+                  <a:pt x="609600" y="990600"/>
+                </a:lnTo>
+                <a:lnTo>
+                  <a:pt x="609600" y="1028700"/>
+                </a:lnTo>
+                <a:lnTo>
+                  <a:pt x="495300" y="1028700"/>
+                </a:lnTo>
+                <a:close/>
+                <a:moveTo>
+                  <a:pt x="647700" y="990600"/>
+                </a:moveTo>
+                <a:lnTo>
+                  <a:pt x="762000" y="990600"/>
+                </a:lnTo>
+                <a:lnTo>
+                  <a:pt x="762000" y="1028700"/>
+                </a:lnTo>
+                <a:lnTo>
+                  <a:pt x="647700" y="1028700"/>
+                </a:lnTo>
+                <a:close/>
+                <a:moveTo>
+                  <a:pt x="800100" y="990600"/>
+                </a:moveTo>
+                <a:lnTo>
+                  <a:pt x="914400" y="990600"/>
+                </a:lnTo>
+                <a:lnTo>
+                  <a:pt x="914400" y="1028700"/>
+                </a:lnTo>
+                <a:lnTo>
+                  <a:pt x="800100" y="1028700"/>
+                </a:lnTo>
+                <a:close/>
+                <a:moveTo>
+                  <a:pt x="990600" y="990600"/>
+                </a:moveTo>
+                <a:lnTo>
+                  <a:pt x="1066800" y="990600"/>
+                </a:lnTo>
+                <a:lnTo>
+                  <a:pt x="1066800" y="1028700"/>
+                </a:lnTo>
+                <a:lnTo>
+                  <a:pt x="990600" y="1028700"/>
+                </a:lnTo>
+                <a:close/>
+                <a:moveTo>
+                  <a:pt x="457200" y="1028700"/>
+                </a:moveTo>
+                <a:lnTo>
+                  <a:pt x="533400" y="1028700"/>
+                </a:lnTo>
+                <a:lnTo>
+                  <a:pt x="533400" y="1066800"/>
+                </a:lnTo>
+                <a:lnTo>
+                  <a:pt x="457200" y="1066800"/>
+                </a:lnTo>
+                <a:close/>
+                <a:moveTo>
+                  <a:pt x="571500" y="1028700"/>
+                </a:moveTo>
+                <a:lnTo>
+                  <a:pt x="723900" y="1028700"/>
+                </a:lnTo>
+                <a:lnTo>
+                  <a:pt x="723900" y="1066800"/>
+                </a:lnTo>
+                <a:lnTo>
+                  <a:pt x="571500" y="1066800"/>
+                </a:lnTo>
+                <a:close/>
+                <a:moveTo>
+                  <a:pt x="762000" y="1028700"/>
+                </a:moveTo>
+                <a:lnTo>
+                  <a:pt x="838200" y="1028700"/>
+                </a:lnTo>
+                <a:lnTo>
+                  <a:pt x="838200" y="1066800"/>
+                </a:lnTo>
+                <a:lnTo>
+                  <a:pt x="762000" y="1066800"/>
+                </a:lnTo>
+                <a:close/>
+                <a:moveTo>
+                  <a:pt x="952500" y="1028700"/>
+                </a:moveTo>
+                <a:lnTo>
+                  <a:pt x="1028700" y="1028700"/>
+                </a:lnTo>
+                <a:lnTo>
+                  <a:pt x="1028700" y="1066800"/>
+                </a:lnTo>
+                <a:lnTo>
+                  <a:pt x="952500" y="1066800"/>
+                </a:lnTo>
+                <a:close/>
+                <a:moveTo>
+                  <a:pt x="1066800" y="1028700"/>
+                </a:moveTo>
+                <a:lnTo>
+                  <a:pt x="1104900" y="1028700"/>
+                </a:lnTo>
+                <a:lnTo>
+                  <a:pt x="1104900" y="1066800"/>
+                </a:lnTo>
+                <a:lnTo>
+                  <a:pt x="1066800" y="1066800"/>
+                </a:lnTo>
+                <a:close/>
+                <a:moveTo>
+                  <a:pt x="0" y="1066800"/>
+                </a:moveTo>
+                <a:lnTo>
+                  <a:pt x="266700" y="1066800"/>
+                </a:lnTo>
+                <a:lnTo>
+                  <a:pt x="266700" y="1104900"/>
+                </a:lnTo>
+                <a:lnTo>
+                  <a:pt x="0" y="1104900"/>
+                </a:lnTo>
+                <a:close/>
+                <a:moveTo>
+                  <a:pt x="304800" y="1066800"/>
+                </a:moveTo>
+                <a:lnTo>
+                  <a:pt x="381000" y="1066800"/>
+                </a:lnTo>
+                <a:lnTo>
+                  <a:pt x="381000" y="1104900"/>
+                </a:lnTo>
+                <a:lnTo>
+                  <a:pt x="304800" y="1104900"/>
+                </a:lnTo>
+                <a:close/>
+                <a:moveTo>
+                  <a:pt x="457200" y="1066800"/>
+                </a:moveTo>
+                <a:lnTo>
+                  <a:pt x="495300" y="1066800"/>
+                </a:lnTo>
+                <a:lnTo>
+                  <a:pt x="495300" y="1104900"/>
+                </a:lnTo>
+                <a:lnTo>
+                  <a:pt x="457200" y="1104900"/>
+                </a:lnTo>
+                <a:close/>
+                <a:moveTo>
+                  <a:pt x="533400" y="1066800"/>
+                </a:moveTo>
+                <a:lnTo>
+                  <a:pt x="685800" y="1066800"/>
+                </a:lnTo>
+                <a:lnTo>
+                  <a:pt x="685800" y="1104900"/>
+                </a:lnTo>
+                <a:lnTo>
+                  <a:pt x="533400" y="1104900"/>
+                </a:lnTo>
+                <a:close/>
+                <a:moveTo>
+                  <a:pt x="723900" y="1066800"/>
+                </a:moveTo>
+                <a:lnTo>
+                  <a:pt x="876300" y="1066800"/>
+                </a:lnTo>
+                <a:lnTo>
+                  <a:pt x="876300" y="1104900"/>
+                </a:lnTo>
+                <a:lnTo>
+                  <a:pt x="723900" y="1104900"/>
+                </a:lnTo>
+                <a:close/>
+                <a:moveTo>
+                  <a:pt x="914400" y="1066800"/>
+                </a:moveTo>
+                <a:lnTo>
+                  <a:pt x="1028700" y="1066800"/>
+                </a:lnTo>
+                <a:lnTo>
+                  <a:pt x="1028700" y="1104900"/>
+                </a:lnTo>
+                <a:lnTo>
+                  <a:pt x="914400" y="1104900"/>
+                </a:lnTo>
+                <a:close/>
+              </a:path>
+            </a:pathLst>
+          </a:custGeom>
+          <a:solidFill>
+            <a:srgbClr val="14505F"/>
+          </a:solidFill>
+          <a:ln>
+            <a:noFill/>
+          </a:ln>
+        </p:spPr>
+      </p:sp>
+      <p:sp>
+        <p:nvSpPr>
+          <p:cNvPr name="GraphCompose Text Line" id="32"/>
           <p:cNvSpPr txBox="true"/>
           <p:nvPr/>
         </p:nvSpPr>
@@ -5087,7 +7346,7 @@
       </p:sp>
       <p:sp>
         <p:nvSpPr>
-          <p:cNvPr name="GraphCompose Text Line" id="32"/>
+          <p:cNvPr name="GraphCompose Text Line" id="33"/>
           <p:cNvSpPr txBox="true"/>
           <p:nvPr/>
         </p:nvSpPr>
@@ -5133,7 +7392,7 @@
       </p:sp>
       <p:sp>
         <p:nvSpPr>
-          <p:cNvPr name="AutoShape 33" id="33"/>
+          <p:cNvPr name="AutoShape 34" id="34"/>
           <p:cNvSpPr/>
           <p:nvPr/>
         </p:nvSpPr>
@@ -5157,7 +7416,7 @@
       </p:sp>
       <p:cxnSp>
         <p:nvCxnSpPr>
-          <p:cNvPr name="Connector 34" id="34"/>
+          <p:cNvPr name="Connector 35" id="35"/>
           <p:cNvCxnSpPr/>
           <p:nvPr/>
         </p:nvCxnSpPr>
@@ -5178,7 +7437,7 @@
       </p:cxnSp>
       <p:sp>
         <p:nvSpPr>
-          <p:cNvPr name="GraphCompose Text Line" id="35"/>
+          <p:cNvPr name="GraphCompose Text Line" id="36"/>
           <p:cNvSpPr txBox="true"/>
           <p:nvPr/>
         </p:nvSpPr>
@@ -5224,7 +7483,7 @@
       </p:sp>
       <p:sp>
         <p:nvSpPr>
-          <p:cNvPr name="GraphCompose Text Line" id="36"/>
+          <p:cNvPr name="GraphCompose Text Line" id="37"/>
           <p:cNvSpPr txBox="true"/>
           <p:nvPr/>
         </p:nvSpPr>
@@ -5468,7 +7727,7 @@
       </p:sp>
       <p:sp>
         <p:nvSpPr>
-          <p:cNvPr name="GraphCompose Text Line" id="37"/>
+          <p:cNvPr name="GraphCompose Text Line" id="38"/>
           <p:cNvSpPr txBox="true"/>
           <p:nvPr/>
         </p:nvSpPr>
@@ -5685,7 +7944,7 @@
       </p:sp>
       <p:sp>
         <p:nvSpPr>
-          <p:cNvPr name="GraphCompose Text Line" id="38"/>
+          <p:cNvPr name="GraphCompose Text Line" id="39"/>
           <p:cNvSpPr txBox="true"/>
           <p:nvPr/>
         </p:nvSpPr>
@@ -5902,7 +8161,7 @@
       </p:sp>
       <p:sp>
         <p:nvSpPr>
-          <p:cNvPr name="GraphCompose Text Line" id="39"/>
+          <p:cNvPr name="GraphCompose Text Line" id="40"/>
           <p:cNvSpPr txBox="true"/>
           <p:nvPr/>
         </p:nvSpPr>
@@ -6083,7 +8342,7 @@
       </p:sp>
       <p:sp>
         <p:nvSpPr>
-          <p:cNvPr name="GraphCompose Text Line" id="40"/>
+          <p:cNvPr name="GraphCompose Text Line" id="41"/>
           <p:cNvSpPr txBox="true"/>
           <p:nvPr/>
         </p:nvSpPr>
@@ -6192,7 +8451,7 @@
       </p:sp>
       <p:sp>
         <p:nvSpPr>
-          <p:cNvPr name="GraphCompose Text Line" id="41"/>
+          <p:cNvPr name="GraphCompose Text Line" id="42"/>
           <p:cNvSpPr txBox="true"/>
           <p:nvPr/>
         </p:nvSpPr>
@@ -6238,7 +8497,7 @@
       </p:sp>
       <p:sp>
         <p:nvSpPr>
-          <p:cNvPr name="GraphCompose Text Line" id="42"/>
+          <p:cNvPr name="GraphCompose Text Line" id="43"/>
           <p:cNvSpPr txBox="true"/>
           <p:nvPr/>
         </p:nvSpPr>
@@ -6284,7 +8543,7 @@
       </p:sp>
       <p:sp>
         <p:nvSpPr>
-          <p:cNvPr name="GraphCompose Table Cell Fill" id="43"/>
+          <p:cNvPr name="GraphCompose Table Cell Fill" id="44"/>
           <p:cNvSpPr/>
           <p:nvPr/>
         </p:nvSpPr>
@@ -6306,7 +8565,7 @@
       </p:sp>
       <p:sp>
         <p:nvSpPr>
-          <p:cNvPr name="GraphCompose Table Cell Fill" id="44"/>
+          <p:cNvPr name="GraphCompose Table Cell Fill" id="45"/>
           <p:cNvSpPr/>
           <p:nvPr/>
         </p:nvSpPr>
@@ -6328,7 +8587,7 @@
       </p:sp>
       <p:sp>
         <p:nvSpPr>
-          <p:cNvPr name="GraphCompose Table Cell Fill" id="45"/>
+          <p:cNvPr name="GraphCompose Table Cell Fill" id="46"/>
           <p:cNvSpPr/>
           <p:nvPr/>
         </p:nvSpPr>
@@ -6350,7 +8609,7 @@
       </p:sp>
       <p:sp>
         <p:nvSpPr>
-          <p:cNvPr name="GraphCompose Table Cell Fill" id="46"/>
+          <p:cNvPr name="GraphCompose Table Cell Fill" id="47"/>
           <p:cNvSpPr/>
           <p:nvPr/>
         </p:nvSpPr>
@@ -6372,7 +8631,7 @@
       </p:sp>
       <p:sp>
         <p:nvSpPr>
-          <p:cNvPr name="GraphCompose Table Cell Fill" id="47"/>
+          <p:cNvPr name="GraphCompose Table Cell Fill" id="48"/>
           <p:cNvSpPr/>
           <p:nvPr/>
         </p:nvSpPr>
@@ -6394,7 +8653,7 @@
       </p:sp>
       <p:sp>
         <p:nvSpPr>
-          <p:cNvPr name="GraphCompose Table Cell Fill" id="48"/>
+          <p:cNvPr name="GraphCompose Table Cell Fill" id="49"/>
           <p:cNvSpPr/>
           <p:nvPr/>
         </p:nvSpPr>
@@ -6416,7 +8675,7 @@
       </p:sp>
       <p:sp>
         <p:nvSpPr>
-          <p:cNvPr name="GraphCompose Table Cell Fill" id="49"/>
+          <p:cNvPr name="GraphCompose Table Cell Fill" id="50"/>
           <p:cNvSpPr/>
           <p:nvPr/>
         </p:nvSpPr>
@@ -6438,7 +8697,7 @@
       </p:sp>
       <p:sp>
         <p:nvSpPr>
-          <p:cNvPr name="GraphCompose Table Cell Fill" id="50"/>
+          <p:cNvPr name="GraphCompose Table Cell Fill" id="51"/>
           <p:cNvSpPr/>
           <p:nvPr/>
         </p:nvSpPr>
@@ -6460,7 +8719,7 @@
       </p:sp>
       <p:sp>
         <p:nvSpPr>
-          <p:cNvPr name="GraphCompose Table Cell Fill" id="51"/>
+          <p:cNvPr name="GraphCompose Table Cell Fill" id="52"/>
           <p:cNvSpPr/>
           <p:nvPr/>
         </p:nvSpPr>
@@ -6482,7 +8741,7 @@
       </p:sp>
       <p:sp>
         <p:nvSpPr>
-          <p:cNvPr name="GraphCompose Table Cell Fill" id="52"/>
+          <p:cNvPr name="GraphCompose Table Cell Fill" id="53"/>
           <p:cNvSpPr/>
           <p:nvPr/>
         </p:nvSpPr>
@@ -6504,7 +8763,7 @@
       </p:sp>
       <p:sp>
         <p:nvSpPr>
-          <p:cNvPr name="GraphCompose Table Cell Fill" id="53"/>
+          <p:cNvPr name="GraphCompose Table Cell Fill" id="54"/>
           <p:cNvSpPr/>
           <p:nvPr/>
         </p:nvSpPr>
@@ -6526,7 +8785,7 @@
       </p:sp>
       <p:sp>
         <p:nvSpPr>
-          <p:cNvPr name="GraphCompose Table Cell Fill" id="54"/>
+          <p:cNvPr name="GraphCompose Table Cell Fill" id="55"/>
           <p:cNvSpPr/>
           <p:nvPr/>
         </p:nvSpPr>
@@ -6548,7 +8807,7 @@
       </p:sp>
       <p:sp>
         <p:nvSpPr>
-          <p:cNvPr name="GraphCompose Table Cell Fill" id="55"/>
+          <p:cNvPr name="GraphCompose Table Cell Fill" id="56"/>
           <p:cNvSpPr/>
           <p:nvPr/>
         </p:nvSpPr>
@@ -6570,7 +8829,7 @@
       </p:sp>
       <p:sp>
         <p:nvSpPr>
-          <p:cNvPr name="GraphCompose Table Cell Fill" id="56"/>
+          <p:cNvPr name="GraphCompose Table Cell Fill" id="57"/>
           <p:cNvSpPr/>
           <p:nvPr/>
         </p:nvSpPr>
@@ -6592,7 +8851,7 @@
       </p:sp>
       <p:sp>
         <p:nvSpPr>
-          <p:cNvPr name="GraphCompose Table Cell Fill" id="57"/>
+          <p:cNvPr name="GraphCompose Table Cell Fill" id="58"/>
           <p:cNvSpPr/>
           <p:nvPr/>
         </p:nvSpPr>
@@ -6614,7 +8873,7 @@
       </p:sp>
       <p:sp>
         <p:nvSpPr>
-          <p:cNvPr name="GraphCompose Table Cell Fill" id="58"/>
+          <p:cNvPr name="GraphCompose Table Cell Fill" id="59"/>
           <p:cNvSpPr/>
           <p:nvPr/>
         </p:nvSpPr>
@@ -6636,7 +8895,7 @@
       </p:sp>
       <p:sp>
         <p:nvSpPr>
-          <p:cNvPr name="GraphCompose Table Cell Fill" id="59"/>
+          <p:cNvPr name="GraphCompose Table Cell Fill" id="60"/>
           <p:cNvSpPr/>
           <p:nvPr/>
         </p:nvSpPr>
@@ -6658,7 +8917,7 @@
       </p:sp>
       <p:sp>
         <p:nvSpPr>
-          <p:cNvPr name="GraphCompose Table Cell Fill" id="60"/>
+          <p:cNvPr name="GraphCompose Table Cell Fill" id="61"/>
           <p:cNvSpPr/>
           <p:nvPr/>
         </p:nvSpPr>
@@ -6680,7 +8939,7 @@
       </p:sp>
       <p:sp>
         <p:nvSpPr>
-          <p:cNvPr name="GraphCompose Table Cell Fill" id="61"/>
+          <p:cNvPr name="GraphCompose Table Cell Fill" id="62"/>
           <p:cNvSpPr/>
           <p:nvPr/>
         </p:nvSpPr>
@@ -6702,7 +8961,7 @@
       </p:sp>
       <p:sp>
         <p:nvSpPr>
-          <p:cNvPr name="GraphCompose Table Cell Fill" id="62"/>
+          <p:cNvPr name="GraphCompose Table Cell Fill" id="63"/>
           <p:cNvSpPr/>
           <p:nvPr/>
         </p:nvSpPr>
@@ -6724,7 +8983,7 @@
       </p:sp>
       <p:sp>
         <p:nvSpPr>
-          <p:cNvPr name="GraphCompose Table Cell Fill" id="63"/>
+          <p:cNvPr name="GraphCompose Table Cell Fill" id="64"/>
           <p:cNvSpPr/>
           <p:nvPr/>
         </p:nvSpPr>
@@ -6746,7 +9005,7 @@
       </p:sp>
       <p:sp>
         <p:nvSpPr>
-          <p:cNvPr name="GraphCompose Table Cell Fill" id="64"/>
+          <p:cNvPr name="GraphCompose Table Cell Fill" id="65"/>
           <p:cNvSpPr/>
           <p:nvPr/>
         </p:nvSpPr>
@@ -6768,7 +9027,7 @@
       </p:sp>
       <p:sp>
         <p:nvSpPr>
-          <p:cNvPr name="GraphCompose Table Cell Fill" id="65"/>
+          <p:cNvPr name="GraphCompose Table Cell Fill" id="66"/>
           <p:cNvSpPr/>
           <p:nvPr/>
         </p:nvSpPr>
@@ -6790,7 +9049,7 @@
       </p:sp>
       <p:sp>
         <p:nvSpPr>
-          <p:cNvPr name="GraphCompose Table Cell Fill" id="66"/>
+          <p:cNvPr name="GraphCompose Table Cell Fill" id="67"/>
           <p:cNvSpPr/>
           <p:nvPr/>
         </p:nvSpPr>
@@ -6812,7 +9071,7 @@
       </p:sp>
       <p:sp>
         <p:nvSpPr>
-          <p:cNvPr name="GraphCompose Table Cell Fill" id="67"/>
+          <p:cNvPr name="GraphCompose Table Cell Fill" id="68"/>
           <p:cNvSpPr/>
           <p:nvPr/>
         </p:nvSpPr>
@@ -6834,7 +9093,7 @@
       </p:sp>
       <p:sp>
         <p:nvSpPr>
-          <p:cNvPr name="GraphCompose Table Cell Fill" id="68"/>
+          <p:cNvPr name="GraphCompose Table Cell Fill" id="69"/>
           <p:cNvSpPr/>
           <p:nvPr/>
         </p:nvSpPr>
@@ -6856,7 +9115,7 @@
       </p:sp>
       <p:sp>
         <p:nvSpPr>
-          <p:cNvPr name="GraphCompose Table Cell Fill" id="69"/>
+          <p:cNvPr name="GraphCompose Table Cell Fill" id="70"/>
           <p:cNvSpPr/>
           <p:nvPr/>
         </p:nvSpPr>
@@ -6878,7 +9137,7 @@
       </p:sp>
       <p:sp>
         <p:nvSpPr>
-          <p:cNvPr name="GraphCompose Table Cell Fill" id="70"/>
+          <p:cNvPr name="GraphCompose Table Cell Fill" id="71"/>
           <p:cNvSpPr/>
           <p:nvPr/>
         </p:nvSpPr>
@@ -6900,7 +9159,7 @@
       </p:sp>
       <p:sp>
         <p:nvSpPr>
-          <p:cNvPr name="GraphCompose Table Cell Fill" id="71"/>
+          <p:cNvPr name="GraphCompose Table Cell Fill" id="72"/>
           <p:cNvSpPr/>
           <p:nvPr/>
         </p:nvSpPr>
@@ -6922,7 +9181,7 @@
       </p:sp>
       <p:sp>
         <p:nvSpPr>
-          <p:cNvPr name="GraphCompose Table Cell Fill" id="72"/>
+          <p:cNvPr name="GraphCompose Table Cell Fill" id="73"/>
           <p:cNvSpPr/>
           <p:nvPr/>
         </p:nvSpPr>
@@ -6944,7 +9203,7 @@
       </p:sp>
       <p:sp>
         <p:nvSpPr>
-          <p:cNvPr name="GraphCompose Table Cell Fill" id="73"/>
+          <p:cNvPr name="GraphCompose Table Cell Fill" id="74"/>
           <p:cNvSpPr/>
           <p:nvPr/>
         </p:nvSpPr>
@@ -6966,7 +9225,7 @@
       </p:sp>
       <p:sp>
         <p:nvSpPr>
-          <p:cNvPr name="GraphCompose Table Cell Fill" id="74"/>
+          <p:cNvPr name="GraphCompose Table Cell Fill" id="75"/>
           <p:cNvSpPr/>
           <p:nvPr/>
         </p:nvSpPr>
@@ -6988,7 +9247,7 @@
       </p:sp>
       <p:sp>
         <p:nvSpPr>
-          <p:cNvPr name="GraphCompose Table Cell Fill" id="75"/>
+          <p:cNvPr name="GraphCompose Table Cell Fill" id="76"/>
           <p:cNvSpPr/>
           <p:nvPr/>
         </p:nvSpPr>
@@ -7010,7 +9269,7 @@
       </p:sp>
       <p:sp>
         <p:nvSpPr>
-          <p:cNvPr name="GraphCompose Table Cell Fill" id="76"/>
+          <p:cNvPr name="GraphCompose Table Cell Fill" id="77"/>
           <p:cNvSpPr/>
           <p:nvPr/>
         </p:nvSpPr>
@@ -7032,7 +9291,7 @@
       </p:sp>
       <p:sp>
         <p:nvSpPr>
-          <p:cNvPr name="GraphCompose Table Cell Fill" id="77"/>
+          <p:cNvPr name="GraphCompose Table Cell Fill" id="78"/>
           <p:cNvSpPr/>
           <p:nvPr/>
         </p:nvSpPr>
@@ -7054,7 +9313,7 @@
       </p:sp>
       <p:sp>
         <p:nvSpPr>
-          <p:cNvPr name="GraphCompose Table Cell Fill" id="78"/>
+          <p:cNvPr name="GraphCompose Table Cell Fill" id="79"/>
           <p:cNvSpPr/>
           <p:nvPr/>
         </p:nvSpPr>
@@ -7076,7 +9335,7 @@
       </p:sp>
       <p:sp>
         <p:nvSpPr>
-          <p:cNvPr name="GraphCompose Table Cell Fill" id="79"/>
+          <p:cNvPr name="GraphCompose Table Cell Fill" id="80"/>
           <p:cNvSpPr/>
           <p:nvPr/>
         </p:nvSpPr>
@@ -7098,7 +9357,7 @@
       </p:sp>
       <p:sp>
         <p:nvSpPr>
-          <p:cNvPr name="GraphCompose Table Cell Fill" id="80"/>
+          <p:cNvPr name="GraphCompose Table Cell Fill" id="81"/>
           <p:cNvSpPr/>
           <p:nvPr/>
         </p:nvSpPr>
@@ -7120,7 +9379,7 @@
       </p:sp>
       <p:sp>
         <p:nvSpPr>
-          <p:cNvPr name="GraphCompose Table Cell Fill" id="81"/>
+          <p:cNvPr name="GraphCompose Table Cell Fill" id="82"/>
           <p:cNvSpPr/>
           <p:nvPr/>
         </p:nvSpPr>
@@ -7142,7 +9401,7 @@
       </p:sp>
       <p:sp>
         <p:nvSpPr>
-          <p:cNvPr name="GraphCompose Table Cell Fill" id="82"/>
+          <p:cNvPr name="GraphCompose Table Cell Fill" id="83"/>
           <p:cNvSpPr/>
           <p:nvPr/>
         </p:nvSpPr>
@@ -7164,7 +9423,7 @@
       </p:sp>
       <p:cxnSp>
         <p:nvCxnSpPr>
-          <p:cNvPr name="GraphCompose Table Cell Border" id="83"/>
+          <p:cNvPr name="GraphCompose Table Cell Border" id="84"/>
           <p:cNvCxnSpPr/>
           <p:nvPr/>
         </p:nvCxnSpPr>
@@ -7185,7 +9444,7 @@
       </p:cxnSp>
       <p:cxnSp>
         <p:nvCxnSpPr>
-          <p:cNvPr name="GraphCompose Table Cell Border" id="84"/>
+          <p:cNvPr name="GraphCompose Table Cell Border" id="85"/>
           <p:cNvCxnSpPr/>
           <p:nvPr/>
         </p:nvCxnSpPr>
@@ -7206,7 +9465,7 @@
       </p:cxnSp>
       <p:cxnSp>
         <p:nvCxnSpPr>
-          <p:cNvPr name="GraphCompose Table Cell Border" id="85"/>
+          <p:cNvPr name="GraphCompose Table Cell Border" id="86"/>
           <p:cNvCxnSpPr/>
           <p:nvPr/>
         </p:nvCxnSpPr>
@@ -7227,7 +9486,7 @@
       </p:cxnSp>
       <p:cxnSp>
         <p:nvCxnSpPr>
-          <p:cNvPr name="GraphCompose Table Cell Border" id="86"/>
+          <p:cNvPr name="GraphCompose Table Cell Border" id="87"/>
           <p:cNvCxnSpPr/>
           <p:nvPr/>
         </p:nvCxnSpPr>
@@ -7248,7 +9507,7 @@
       </p:cxnSp>
       <p:sp>
         <p:nvSpPr>
-          <p:cNvPr name="GraphCompose Table Cell Text" id="87"/>
+          <p:cNvPr name="GraphCompose Table Cell Text" id="88"/>
           <p:cNvSpPr txBox="true"/>
           <p:nvPr/>
         </p:nvSpPr>
@@ -7285,7 +9544,7 @@
       </p:sp>
       <p:cxnSp>
         <p:nvCxnSpPr>
-          <p:cNvPr name="GraphCompose Table Cell Border" id="88"/>
+          <p:cNvPr name="GraphCompose Table Cell Border" id="89"/>
           <p:cNvCxnSpPr/>
           <p:nvPr/>
         </p:nvCxnSpPr>
@@ -7306,7 +9565,7 @@
       </p:cxnSp>
       <p:cxnSp>
         <p:nvCxnSpPr>
-          <p:cNvPr name="GraphCompose Table Cell Border" id="89"/>
+          <p:cNvPr name="GraphCompose Table Cell Border" id="90"/>
           <p:cNvCxnSpPr/>
           <p:nvPr/>
         </p:nvCxnSpPr>
@@ -7327,7 +9586,7 @@
       </p:cxnSp>
       <p:cxnSp>
         <p:nvCxnSpPr>
-          <p:cNvPr name="GraphCompose Table Cell Border" id="90"/>
+          <p:cNvPr name="GraphCompose Table Cell Border" id="91"/>
           <p:cNvCxnSpPr/>
           <p:nvPr/>
         </p:nvCxnSpPr>
@@ -7348,7 +9607,7 @@
       </p:cxnSp>
       <p:sp>
         <p:nvSpPr>
-          <p:cNvPr name="GraphCompose Table Cell Text" id="91"/>
+          <p:cNvPr name="GraphCompose Table Cell Text" id="92"/>
           <p:cNvSpPr txBox="true"/>
           <p:nvPr/>
         </p:nvSpPr>
@@ -7385,7 +9644,7 @@
       </p:sp>
       <p:cxnSp>
         <p:nvCxnSpPr>
-          <p:cNvPr name="GraphCompose Table Cell Border" id="92"/>
+          <p:cNvPr name="GraphCompose Table Cell Border" id="93"/>
           <p:cNvCxnSpPr/>
           <p:nvPr/>
         </p:nvCxnSpPr>
@@ -7406,7 +9665,7 @@
       </p:cxnSp>
       <p:cxnSp>
         <p:nvCxnSpPr>
-          <p:cNvPr name="GraphCompose Table Cell Border" id="93"/>
+          <p:cNvPr name="GraphCompose Table Cell Border" id="94"/>
           <p:cNvCxnSpPr/>
           <p:nvPr/>
         </p:nvCxnSpPr>
@@ -7427,7 +9686,7 @@
       </p:cxnSp>
       <p:cxnSp>
         <p:nvCxnSpPr>
-          <p:cNvPr name="GraphCompose Table Cell Border" id="94"/>
+          <p:cNvPr name="GraphCompose Table Cell Border" id="95"/>
           <p:cNvCxnSpPr/>
           <p:nvPr/>
         </p:nvCxnSpPr>
@@ -7448,7 +9707,7 @@
       </p:cxnSp>
       <p:sp>
         <p:nvSpPr>
-          <p:cNvPr name="GraphCompose Table Cell Text" id="95"/>
+          <p:cNvPr name="GraphCompose Table Cell Text" id="96"/>
           <p:cNvSpPr txBox="true"/>
           <p:nvPr/>
         </p:nvSpPr>
@@ -7485,7 +9744,7 @@
       </p:sp>
       <p:cxnSp>
         <p:nvCxnSpPr>
-          <p:cNvPr name="GraphCompose Table Cell Border" id="96"/>
+          <p:cNvPr name="GraphCompose Table Cell Border" id="97"/>
           <p:cNvCxnSpPr/>
           <p:nvPr/>
         </p:nvCxnSpPr>
@@ -7506,7 +9765,7 @@
       </p:cxnSp>
       <p:cxnSp>
         <p:nvCxnSpPr>
-          <p:cNvPr name="GraphCompose Table Cell Border" id="97"/>
+          <p:cNvPr name="GraphCompose Table Cell Border" id="98"/>
           <p:cNvCxnSpPr/>
           <p:nvPr/>
         </p:nvCxnSpPr>
@@ -7527,7 +9786,7 @@
       </p:cxnSp>
       <p:cxnSp>
         <p:nvCxnSpPr>
-          <p:cNvPr name="GraphCompose Table Cell Border" id="98"/>
+          <p:cNvPr name="GraphCompose Table Cell Border" id="99"/>
           <p:cNvCxnSpPr/>
           <p:nvPr/>
         </p:nvCxnSpPr>
@@ -7548,7 +9807,7 @@
       </p:cxnSp>
       <p:sp>
         <p:nvSpPr>
-          <p:cNvPr name="GraphCompose Table Cell Text" id="99"/>
+          <p:cNvPr name="GraphCompose Table Cell Text" id="100"/>
           <p:cNvSpPr txBox="true"/>
           <p:nvPr/>
         </p:nvSpPr>
@@ -7585,7 +9844,7 @@
       </p:sp>
       <p:cxnSp>
         <p:nvCxnSpPr>
-          <p:cNvPr name="GraphCompose Table Cell Border" id="100"/>
+          <p:cNvPr name="GraphCompose Table Cell Border" id="101"/>
           <p:cNvCxnSpPr/>
           <p:nvPr/>
         </p:nvCxnSpPr>
@@ -7606,7 +9865,7 @@
       </p:cxnSp>
       <p:cxnSp>
         <p:nvCxnSpPr>
-          <p:cNvPr name="GraphCompose Table Cell Border" id="101"/>
+          <p:cNvPr name="GraphCompose Table Cell Border" id="102"/>
           <p:cNvCxnSpPr/>
           <p:nvPr/>
         </p:nvCxnSpPr>
@@ -7627,7 +9886,7 @@
       </p:cxnSp>
       <p:cxnSp>
         <p:nvCxnSpPr>
-          <p:cNvPr name="GraphCompose Table Cell Border" id="102"/>
+          <p:cNvPr name="GraphCompose Table Cell Border" id="103"/>
           <p:cNvCxnSpPr/>
           <p:nvPr/>
         </p:nvCxnSpPr>
@@ -7648,7 +9907,7 @@
       </p:cxnSp>
       <p:sp>
         <p:nvSpPr>
-          <p:cNvPr name="GraphCompose Table Cell Text" id="103"/>
+          <p:cNvPr name="GraphCompose Table Cell Text" id="104"/>
           <p:cNvSpPr txBox="true"/>
           <p:nvPr/>
         </p:nvSpPr>
@@ -7685,7 +9944,7 @@
       </p:sp>
       <p:cxnSp>
         <p:nvCxnSpPr>
-          <p:cNvPr name="GraphCompose Table Cell Border" id="104"/>
+          <p:cNvPr name="GraphCompose Table Cell Border" id="105"/>
           <p:cNvCxnSpPr/>
           <p:nvPr/>
         </p:nvCxnSpPr>
@@ -7706,7 +9965,7 @@
       </p:cxnSp>
       <p:cxnSp>
         <p:nvCxnSpPr>
-          <p:cNvPr name="GraphCompose Table Cell Border" id="105"/>
+          <p:cNvPr name="GraphCompose Table Cell Border" id="106"/>
           <p:cNvCxnSpPr/>
           <p:nvPr/>
         </p:nvCxnSpPr>
@@ -7727,7 +9986,7 @@
       </p:cxnSp>
       <p:cxnSp>
         <p:nvCxnSpPr>
-          <p:cNvPr name="GraphCompose Table Cell Border" id="106"/>
+          <p:cNvPr name="GraphCompose Table Cell Border" id="107"/>
           <p:cNvCxnSpPr/>
           <p:nvPr/>
         </p:nvCxnSpPr>
@@ -7748,7 +10007,7 @@
       </p:cxnSp>
       <p:sp>
         <p:nvSpPr>
-          <p:cNvPr name="GraphCompose Table Cell Text" id="107"/>
+          <p:cNvPr name="GraphCompose Table Cell Text" id="108"/>
           <p:cNvSpPr txBox="true"/>
           <p:nvPr/>
         </p:nvSpPr>
@@ -7785,7 +10044,7 @@
       </p:sp>
       <p:cxnSp>
         <p:nvCxnSpPr>
-          <p:cNvPr name="GraphCompose Table Cell Border" id="108"/>
+          <p:cNvPr name="GraphCompose Table Cell Border" id="109"/>
           <p:cNvCxnSpPr/>
           <p:nvPr/>
         </p:nvCxnSpPr>
@@ -7806,7 +10065,7 @@
       </p:cxnSp>
       <p:cxnSp>
         <p:nvCxnSpPr>
-          <p:cNvPr name="GraphCompose Table Cell Border" id="109"/>
+          <p:cNvPr name="GraphCompose Table Cell Border" id="110"/>
           <p:cNvCxnSpPr/>
           <p:nvPr/>
         </p:nvCxnSpPr>
@@ -7827,7 +10086,7 @@
       </p:cxnSp>
       <p:sp>
         <p:nvSpPr>
-          <p:cNvPr name="GraphCompose Table Cell Text" id="110"/>
+          <p:cNvPr name="GraphCompose Table Cell Text" id="111"/>
           <p:cNvSpPr txBox="true"/>
           <p:nvPr/>
         </p:nvSpPr>
@@ -7864,7 +10123,7 @@
       </p:sp>
       <p:cxnSp>
         <p:nvCxnSpPr>
-          <p:cNvPr name="GraphCompose Table Cell Border" id="111"/>
+          <p:cNvPr name="GraphCompose Table Cell Border" id="112"/>
           <p:cNvCxnSpPr/>
           <p:nvPr/>
         </p:nvCxnSpPr>
@@ -7885,7 +10144,7 @@
       </p:cxnSp>
       <p:cxnSp>
         <p:nvCxnSpPr>
-          <p:cNvPr name="GraphCompose Table Cell Border" id="112"/>
+          <p:cNvPr name="GraphCompose Table Cell Border" id="113"/>
           <p:cNvCxnSpPr/>
           <p:nvPr/>
         </p:nvCxnSpPr>
@@ -7906,7 +10165,7 @@
       </p:cxnSp>
       <p:sp>
         <p:nvSpPr>
-          <p:cNvPr name="GraphCompose Table Cell Text" id="113"/>
+          <p:cNvPr name="GraphCompose Table Cell Text" id="114"/>
           <p:cNvSpPr txBox="true"/>
           <p:nvPr/>
         </p:nvSpPr>
@@ -7943,7 +10202,7 @@
       </p:sp>
       <p:cxnSp>
         <p:nvCxnSpPr>
-          <p:cNvPr name="GraphCompose Table Cell Border" id="114"/>
+          <p:cNvPr name="GraphCompose Table Cell Border" id="115"/>
           <p:cNvCxnSpPr/>
           <p:nvPr/>
         </p:nvCxnSpPr>
@@ -7964,7 +10223,7 @@
       </p:cxnSp>
       <p:cxnSp>
         <p:nvCxnSpPr>
-          <p:cNvPr name="GraphCompose Table Cell Border" id="115"/>
+          <p:cNvPr name="GraphCompose Table Cell Border" id="116"/>
           <p:cNvCxnSpPr/>
           <p:nvPr/>
         </p:nvCxnSpPr>
@@ -7985,7 +10244,7 @@
       </p:cxnSp>
       <p:sp>
         <p:nvSpPr>
-          <p:cNvPr name="GraphCompose Table Cell Text" id="116"/>
+          <p:cNvPr name="GraphCompose Table Cell Text" id="117"/>
           <p:cNvSpPr txBox="true"/>
           <p:nvPr/>
         </p:nvSpPr>
@@ -8022,7 +10281,7 @@
       </p:sp>
       <p:cxnSp>
         <p:nvCxnSpPr>
-          <p:cNvPr name="GraphCompose Table Cell Border" id="117"/>
+          <p:cNvPr name="GraphCompose Table Cell Border" id="118"/>
           <p:cNvCxnSpPr/>
           <p:nvPr/>
         </p:nvCxnSpPr>
@@ -8043,7 +10302,7 @@
       </p:cxnSp>
       <p:cxnSp>
         <p:nvCxnSpPr>
-          <p:cNvPr name="GraphCompose Table Cell Border" id="118"/>
+          <p:cNvPr name="GraphCompose Table Cell Border" id="119"/>
           <p:cNvCxnSpPr/>
           <p:nvPr/>
         </p:nvCxnSpPr>
@@ -8064,7 +10323,7 @@
       </p:cxnSp>
       <p:sp>
         <p:nvSpPr>
-          <p:cNvPr name="GraphCompose Table Cell Text" id="119"/>
+          <p:cNvPr name="GraphCompose Table Cell Text" id="120"/>
           <p:cNvSpPr txBox="true"/>
           <p:nvPr/>
         </p:nvSpPr>
@@ -8101,7 +10360,7 @@
       </p:sp>
       <p:cxnSp>
         <p:nvCxnSpPr>
-          <p:cNvPr name="GraphCompose Table Cell Border" id="120"/>
+          <p:cNvPr name="GraphCompose Table Cell Border" id="121"/>
           <p:cNvCxnSpPr/>
           <p:nvPr/>
         </p:nvCxnSpPr>
@@ -8122,7 +10381,7 @@
       </p:cxnSp>
       <p:cxnSp>
         <p:nvCxnSpPr>
-          <p:cNvPr name="GraphCompose Table Cell Border" id="121"/>
+          <p:cNvPr name="GraphCompose Table Cell Border" id="122"/>
           <p:cNvCxnSpPr/>
           <p:nvPr/>
         </p:nvCxnSpPr>
@@ -8143,7 +10402,7 @@
       </p:cxnSp>
       <p:cxnSp>
         <p:nvCxnSpPr>
-          <p:cNvPr name="GraphCompose Table Cell Border" id="122"/>
+          <p:cNvPr name="GraphCompose Table Cell Border" id="123"/>
           <p:cNvCxnSpPr/>
           <p:nvPr/>
         </p:nvCxnSpPr>
@@ -8164,7 +10423,7 @@
       </p:cxnSp>
       <p:sp>
         <p:nvSpPr>
-          <p:cNvPr name="GraphCompose Table Cell Text" id="123"/>
+          <p:cNvPr name="GraphCompose Table Cell Text" id="124"/>
           <p:cNvSpPr txBox="true"/>
           <p:nvPr/>
         </p:nvSpPr>
@@ -8201,7 +10460,7 @@
       </p:sp>
       <p:cxnSp>
         <p:nvCxnSpPr>
-          <p:cNvPr name="GraphCompose Table Cell Border" id="124"/>
+          <p:cNvPr name="GraphCompose Table Cell Border" id="125"/>
           <p:cNvCxnSpPr/>
           <p:nvPr/>
         </p:nvCxnSpPr>
@@ -8222,7 +10481,7 @@
       </p:cxnSp>
       <p:cxnSp>
         <p:nvCxnSpPr>
-          <p:cNvPr name="GraphCompose Table Cell Border" id="125"/>
+          <p:cNvPr name="GraphCompose Table Cell Border" id="126"/>
           <p:cNvCxnSpPr/>
           <p:nvPr/>
         </p:nvCxnSpPr>
@@ -8243,7 +10502,7 @@
       </p:cxnSp>
       <p:sp>
         <p:nvSpPr>
-          <p:cNvPr name="GraphCompose Table Cell Text" id="126"/>
+          <p:cNvPr name="GraphCompose Table Cell Text" id="127"/>
           <p:cNvSpPr txBox="true"/>
           <p:nvPr/>
         </p:nvSpPr>
@@ -8280,7 +10539,7 @@
       </p:sp>
       <p:cxnSp>
         <p:nvCxnSpPr>
-          <p:cNvPr name="GraphCompose Table Cell Border" id="127"/>
+          <p:cNvPr name="GraphCompose Table Cell Border" id="128"/>
           <p:cNvCxnSpPr/>
           <p:nvPr/>
         </p:nvCxnSpPr>
@@ -8301,7 +10560,7 @@
       </p:cxnSp>
       <p:cxnSp>
         <p:nvCxnSpPr>
-          <p:cNvPr name="GraphCompose Table Cell Border" id="128"/>
+          <p:cNvPr name="GraphCompose Table Cell Border" id="129"/>
           <p:cNvCxnSpPr/>
           <p:nvPr/>
         </p:nvCxnSpPr>
@@ -8322,7 +10581,7 @@
       </p:cxnSp>
       <p:sp>
         <p:nvSpPr>
-          <p:cNvPr name="GraphCompose Table Cell Text" id="129"/>
+          <p:cNvPr name="GraphCompose Table Cell Text" id="130"/>
           <p:cNvSpPr txBox="true"/>
           <p:nvPr/>
         </p:nvSpPr>
@@ -8359,7 +10618,7 @@
       </p:sp>
       <p:cxnSp>
         <p:nvCxnSpPr>
-          <p:cNvPr name="GraphCompose Table Cell Border" id="130"/>
+          <p:cNvPr name="GraphCompose Table Cell Border" id="131"/>
           <p:cNvCxnSpPr/>
           <p:nvPr/>
         </p:nvCxnSpPr>
@@ -8380,7 +10639,7 @@
       </p:cxnSp>
       <p:cxnSp>
         <p:nvCxnSpPr>
-          <p:cNvPr name="GraphCompose Table Cell Border" id="131"/>
+          <p:cNvPr name="GraphCompose Table Cell Border" id="132"/>
           <p:cNvCxnSpPr/>
           <p:nvPr/>
         </p:nvCxnSpPr>
@@ -8401,7 +10660,7 @@
       </p:cxnSp>
       <p:sp>
         <p:nvSpPr>
-          <p:cNvPr name="GraphCompose Table Cell Text" id="132"/>
+          <p:cNvPr name="GraphCompose Table Cell Text" id="133"/>
           <p:cNvSpPr txBox="true"/>
           <p:nvPr/>
         </p:nvSpPr>
@@ -8438,7 +10697,7 @@
       </p:sp>
       <p:cxnSp>
         <p:nvCxnSpPr>
-          <p:cNvPr name="GraphCompose Table Cell Border" id="133"/>
+          <p:cNvPr name="GraphCompose Table Cell Border" id="134"/>
           <p:cNvCxnSpPr/>
           <p:nvPr/>
         </p:nvCxnSpPr>
@@ -8459,7 +10718,7 @@
       </p:cxnSp>
       <p:cxnSp>
         <p:nvCxnSpPr>
-          <p:cNvPr name="GraphCompose Table Cell Border" id="134"/>
+          <p:cNvPr name="GraphCompose Table Cell Border" id="135"/>
           <p:cNvCxnSpPr/>
           <p:nvPr/>
         </p:nvCxnSpPr>
@@ -8480,7 +10739,7 @@
       </p:cxnSp>
       <p:sp>
         <p:nvSpPr>
-          <p:cNvPr name="GraphCompose Table Cell Text" id="135"/>
+          <p:cNvPr name="GraphCompose Table Cell Text" id="136"/>
           <p:cNvSpPr txBox="true"/>
           <p:nvPr/>
         </p:nvSpPr>
@@ -8517,7 +10776,7 @@
       </p:sp>
       <p:cxnSp>
         <p:nvCxnSpPr>
-          <p:cNvPr name="GraphCompose Table Cell Border" id="136"/>
+          <p:cNvPr name="GraphCompose Table Cell Border" id="137"/>
           <p:cNvCxnSpPr/>
           <p:nvPr/>
         </p:nvCxnSpPr>
@@ -8538,7 +10797,7 @@
       </p:cxnSp>
       <p:cxnSp>
         <p:nvCxnSpPr>
-          <p:cNvPr name="GraphCompose Table Cell Border" id="137"/>
+          <p:cNvPr name="GraphCompose Table Cell Border" id="138"/>
           <p:cNvCxnSpPr/>
           <p:nvPr/>
         </p:nvCxnSpPr>
@@ -8559,7 +10818,7 @@
       </p:cxnSp>
       <p:cxnSp>
         <p:nvCxnSpPr>
-          <p:cNvPr name="GraphCompose Table Cell Border" id="138"/>
+          <p:cNvPr name="GraphCompose Table Cell Border" id="139"/>
           <p:cNvCxnSpPr/>
           <p:nvPr/>
         </p:nvCxnSpPr>
@@ -8580,7 +10839,7 @@
       </p:cxnSp>
       <p:sp>
         <p:nvSpPr>
-          <p:cNvPr name="GraphCompose Table Cell Text" id="139"/>
+          <p:cNvPr name="GraphCompose Table Cell Text" id="140"/>
           <p:cNvSpPr txBox="true"/>
           <p:nvPr/>
         </p:nvSpPr>
@@ -8617,7 +10876,7 @@
       </p:sp>
       <p:cxnSp>
         <p:nvCxnSpPr>
-          <p:cNvPr name="GraphCompose Table Cell Border" id="140"/>
+          <p:cNvPr name="GraphCompose Table Cell Border" id="141"/>
           <p:cNvCxnSpPr/>
           <p:nvPr/>
         </p:nvCxnSpPr>
@@ -8638,7 +10897,7 @@
       </p:cxnSp>
       <p:cxnSp>
         <p:nvCxnSpPr>
-          <p:cNvPr name="GraphCompose Table Cell Border" id="141"/>
+          <p:cNvPr name="GraphCompose Table Cell Border" id="142"/>
           <p:cNvCxnSpPr/>
           <p:nvPr/>
         </p:nvCxnSpPr>
@@ -8659,7 +10918,7 @@
       </p:cxnSp>
       <p:sp>
         <p:nvSpPr>
-          <p:cNvPr name="GraphCompose Table Cell Text" id="142"/>
+          <p:cNvPr name="GraphCompose Table Cell Text" id="143"/>
           <p:cNvSpPr txBox="true"/>
           <p:nvPr/>
         </p:nvSpPr>
@@ -8696,7 +10955,7 @@
       </p:sp>
       <p:cxnSp>
         <p:nvCxnSpPr>
-          <p:cNvPr name="GraphCompose Table Cell Border" id="143"/>
+          <p:cNvPr name="GraphCompose Table Cell Border" id="144"/>
           <p:cNvCxnSpPr/>
           <p:nvPr/>
         </p:nvCxnSpPr>
@@ -8717,7 +10976,7 @@
       </p:cxnSp>
       <p:cxnSp>
         <p:nvCxnSpPr>
-          <p:cNvPr name="GraphCompose Table Cell Border" id="144"/>
+          <p:cNvPr name="GraphCompose Table Cell Border" id="145"/>
           <p:cNvCxnSpPr/>
           <p:nvPr/>
         </p:nvCxnSpPr>
@@ -8738,7 +10997,7 @@
       </p:cxnSp>
       <p:sp>
         <p:nvSpPr>
-          <p:cNvPr name="GraphCompose Table Cell Text" id="145"/>
+          <p:cNvPr name="GraphCompose Table Cell Text" id="146"/>
           <p:cNvSpPr txBox="true"/>
           <p:nvPr/>
         </p:nvSpPr>
@@ -8775,7 +11034,7 @@
       </p:sp>
       <p:cxnSp>
         <p:nvCxnSpPr>
-          <p:cNvPr name="GraphCompose Table Cell Border" id="146"/>
+          <p:cNvPr name="GraphCompose Table Cell Border" id="147"/>
           <p:cNvCxnSpPr/>
           <p:nvPr/>
         </p:nvCxnSpPr>
@@ -8796,7 +11055,7 @@
       </p:cxnSp>
       <p:cxnSp>
         <p:nvCxnSpPr>
-          <p:cNvPr name="GraphCompose Table Cell Border" id="147"/>
+          <p:cNvPr name="GraphCompose Table Cell Border" id="148"/>
           <p:cNvCxnSpPr/>
           <p:nvPr/>
         </p:nvCxnSpPr>
@@ -8817,7 +11076,7 @@
       </p:cxnSp>
       <p:sp>
         <p:nvSpPr>
-          <p:cNvPr name="GraphCompose Table Cell Text" id="148"/>
+          <p:cNvPr name="GraphCompose Table Cell Text" id="149"/>
           <p:cNvSpPr txBox="true"/>
           <p:nvPr/>
         </p:nvSpPr>
@@ -8854,7 +11113,7 @@
       </p:sp>
       <p:cxnSp>
         <p:nvCxnSpPr>
-          <p:cNvPr name="GraphCompose Table Cell Border" id="149"/>
+          <p:cNvPr name="GraphCompose Table Cell Border" id="150"/>
           <p:cNvCxnSpPr/>
           <p:nvPr/>
         </p:nvCxnSpPr>
@@ -8875,7 +11134,7 @@
       </p:cxnSp>
       <p:cxnSp>
         <p:nvCxnSpPr>
-          <p:cNvPr name="GraphCompose Table Cell Border" id="150"/>
+          <p:cNvPr name="GraphCompose Table Cell Border" id="151"/>
           <p:cNvCxnSpPr/>
           <p:nvPr/>
         </p:nvCxnSpPr>
@@ -8896,7 +11155,7 @@
       </p:cxnSp>
       <p:sp>
         <p:nvSpPr>
-          <p:cNvPr name="GraphCompose Table Cell Text" id="151"/>
+          <p:cNvPr name="GraphCompose Table Cell Text" id="152"/>
           <p:cNvSpPr txBox="true"/>
           <p:nvPr/>
         </p:nvSpPr>
@@ -8933,7 +11192,7 @@
       </p:sp>
       <p:cxnSp>
         <p:nvCxnSpPr>
-          <p:cNvPr name="GraphCompose Table Cell Border" id="152"/>
+          <p:cNvPr name="GraphCompose Table Cell Border" id="153"/>
           <p:cNvCxnSpPr/>
           <p:nvPr/>
         </p:nvCxnSpPr>
@@ -8954,7 +11213,7 @@
       </p:cxnSp>
       <p:cxnSp>
         <p:nvCxnSpPr>
-          <p:cNvPr name="GraphCompose Table Cell Border" id="153"/>
+          <p:cNvPr name="GraphCompose Table Cell Border" id="154"/>
           <p:cNvCxnSpPr/>
           <p:nvPr/>
         </p:nvCxnSpPr>
@@ -8975,7 +11234,7 @@
       </p:cxnSp>
       <p:cxnSp>
         <p:nvCxnSpPr>
-          <p:cNvPr name="GraphCompose Table Cell Border" id="154"/>
+          <p:cNvPr name="GraphCompose Table Cell Border" id="155"/>
           <p:cNvCxnSpPr/>
           <p:nvPr/>
         </p:nvCxnSpPr>
@@ -8996,7 +11255,7 @@
       </p:cxnSp>
       <p:sp>
         <p:nvSpPr>
-          <p:cNvPr name="GraphCompose Table Cell Text" id="155"/>
+          <p:cNvPr name="GraphCompose Table Cell Text" id="156"/>
           <p:cNvSpPr txBox="true"/>
           <p:nvPr/>
         </p:nvSpPr>
@@ -9033,7 +11292,7 @@
       </p:sp>
       <p:cxnSp>
         <p:nvCxnSpPr>
-          <p:cNvPr name="GraphCompose Table Cell Border" id="156"/>
+          <p:cNvPr name="GraphCompose Table Cell Border" id="157"/>
           <p:cNvCxnSpPr/>
           <p:nvPr/>
         </p:nvCxnSpPr>
@@ -9054,7 +11313,7 @@
       </p:cxnSp>
       <p:cxnSp>
         <p:nvCxnSpPr>
-          <p:cNvPr name="GraphCompose Table Cell Border" id="157"/>
+          <p:cNvPr name="GraphCompose Table Cell Border" id="158"/>
           <p:cNvCxnSpPr/>
           <p:nvPr/>
         </p:nvCxnSpPr>
@@ -9075,7 +11334,7 @@
       </p:cxnSp>
       <p:sp>
         <p:nvSpPr>
-          <p:cNvPr name="GraphCompose Table Cell Text" id="158"/>
+          <p:cNvPr name="GraphCompose Table Cell Text" id="159"/>
           <p:cNvSpPr txBox="true"/>
           <p:nvPr/>
         </p:nvSpPr>
@@ -9112,7 +11371,7 @@
       </p:sp>
       <p:cxnSp>
         <p:nvCxnSpPr>
-          <p:cNvPr name="GraphCompose Table Cell Border" id="159"/>
+          <p:cNvPr name="GraphCompose Table Cell Border" id="160"/>
           <p:cNvCxnSpPr/>
           <p:nvPr/>
         </p:nvCxnSpPr>
@@ -9133,7 +11392,7 @@
       </p:cxnSp>
       <p:cxnSp>
         <p:nvCxnSpPr>
-          <p:cNvPr name="GraphCompose Table Cell Border" id="160"/>
+          <p:cNvPr name="GraphCompose Table Cell Border" id="161"/>
           <p:cNvCxnSpPr/>
           <p:nvPr/>
         </p:nvCxnSpPr>
@@ -9154,7 +11413,7 @@
       </p:cxnSp>
       <p:sp>
         <p:nvSpPr>
-          <p:cNvPr name="GraphCompose Table Cell Text" id="161"/>
+          <p:cNvPr name="GraphCompose Table Cell Text" id="162"/>
           <p:cNvSpPr txBox="true"/>
           <p:nvPr/>
         </p:nvSpPr>
@@ -9191,7 +11450,7 @@
       </p:sp>
       <p:cxnSp>
         <p:nvCxnSpPr>
-          <p:cNvPr name="GraphCompose Table Cell Border" id="162"/>
+          <p:cNvPr name="GraphCompose Table Cell Border" id="163"/>
           <p:cNvCxnSpPr/>
           <p:nvPr/>
         </p:nvCxnSpPr>
@@ -9212,7 +11471,7 @@
       </p:cxnSp>
       <p:cxnSp>
         <p:nvCxnSpPr>
-          <p:cNvPr name="GraphCompose Table Cell Border" id="163"/>
+          <p:cNvPr name="GraphCompose Table Cell Border" id="164"/>
           <p:cNvCxnSpPr/>
           <p:nvPr/>
         </p:nvCxnSpPr>
@@ -9233,7 +11492,7 @@
       </p:cxnSp>
       <p:sp>
         <p:nvSpPr>
-          <p:cNvPr name="GraphCompose Table Cell Text" id="164"/>
+          <p:cNvPr name="GraphCompose Table Cell Text" id="165"/>
           <p:cNvSpPr txBox="true"/>
           <p:nvPr/>
         </p:nvSpPr>
@@ -9270,7 +11529,7 @@
       </p:sp>
       <p:cxnSp>
         <p:nvCxnSpPr>
-          <p:cNvPr name="GraphCompose Table Cell Border" id="165"/>
+          <p:cNvPr name="GraphCompose Table Cell Border" id="166"/>
           <p:cNvCxnSpPr/>
           <p:nvPr/>
         </p:nvCxnSpPr>
@@ -9291,7 +11550,7 @@
       </p:cxnSp>
       <p:cxnSp>
         <p:nvCxnSpPr>
-          <p:cNvPr name="GraphCompose Table Cell Border" id="166"/>
+          <p:cNvPr name="GraphCompose Table Cell Border" id="167"/>
           <p:cNvCxnSpPr/>
           <p:nvPr/>
         </p:nvCxnSpPr>
@@ -9312,7 +11571,7 @@
       </p:cxnSp>
       <p:sp>
         <p:nvSpPr>
-          <p:cNvPr name="GraphCompose Table Cell Text" id="167"/>
+          <p:cNvPr name="GraphCompose Table Cell Text" id="168"/>
           <p:cNvSpPr txBox="true"/>
           <p:nvPr/>
         </p:nvSpPr>
@@ -9349,7 +11608,7 @@
       </p:sp>
       <p:cxnSp>
         <p:nvCxnSpPr>
-          <p:cNvPr name="GraphCompose Table Cell Border" id="168"/>
+          <p:cNvPr name="GraphCompose Table Cell Border" id="169"/>
           <p:cNvCxnSpPr/>
           <p:nvPr/>
         </p:nvCxnSpPr>
@@ -9370,7 +11629,7 @@
       </p:cxnSp>
       <p:cxnSp>
         <p:nvCxnSpPr>
-          <p:cNvPr name="GraphCompose Table Cell Border" id="169"/>
+          <p:cNvPr name="GraphCompose Table Cell Border" id="170"/>
           <p:cNvCxnSpPr/>
           <p:nvPr/>
         </p:nvCxnSpPr>
@@ -9391,7 +11650,7 @@
       </p:cxnSp>
       <p:cxnSp>
         <p:nvCxnSpPr>
-          <p:cNvPr name="GraphCompose Table Cell Border" id="170"/>
+          <p:cNvPr name="GraphCompose Table Cell Border" id="171"/>
           <p:cNvCxnSpPr/>
           <p:nvPr/>
         </p:nvCxnSpPr>
@@ -9412,7 +11671,7 @@
       </p:cxnSp>
       <p:sp>
         <p:nvSpPr>
-          <p:cNvPr name="GraphCompose Table Cell Text" id="171"/>
+          <p:cNvPr name="GraphCompose Table Cell Text" id="172"/>
           <p:cNvSpPr txBox="true"/>
           <p:nvPr/>
         </p:nvSpPr>
@@ -9449,7 +11708,7 @@
       </p:sp>
       <p:cxnSp>
         <p:nvCxnSpPr>
-          <p:cNvPr name="GraphCompose Table Cell Border" id="172"/>
+          <p:cNvPr name="GraphCompose Table Cell Border" id="173"/>
           <p:cNvCxnSpPr/>
           <p:nvPr/>
         </p:nvCxnSpPr>
@@ -9470,7 +11729,7 @@
       </p:cxnSp>
       <p:cxnSp>
         <p:nvCxnSpPr>
-          <p:cNvPr name="GraphCompose Table Cell Border" id="173"/>
+          <p:cNvPr name="GraphCompose Table Cell Border" id="174"/>
           <p:cNvCxnSpPr/>
           <p:nvPr/>
         </p:nvCxnSpPr>
@@ -9491,7 +11750,7 @@
       </p:cxnSp>
       <p:sp>
         <p:nvSpPr>
-          <p:cNvPr name="GraphCompose Table Cell Text" id="174"/>
+          <p:cNvPr name="GraphCompose Table Cell Text" id="175"/>
           <p:cNvSpPr txBox="true"/>
           <p:nvPr/>
         </p:nvSpPr>
@@ -9528,7 +11787,7 @@
       </p:sp>
       <p:cxnSp>
         <p:nvCxnSpPr>
-          <p:cNvPr name="GraphCompose Table Cell Border" id="175"/>
+          <p:cNvPr name="GraphCompose Table Cell Border" id="176"/>
           <p:cNvCxnSpPr/>
           <p:nvPr/>
         </p:nvCxnSpPr>
@@ -9549,7 +11808,7 @@
       </p:cxnSp>
       <p:cxnSp>
         <p:nvCxnSpPr>
-          <p:cNvPr name="GraphCompose Table Cell Border" id="176"/>
+          <p:cNvPr name="GraphCompose Table Cell Border" id="177"/>
           <p:cNvCxnSpPr/>
           <p:nvPr/>
         </p:nvCxnSpPr>
@@ -9570,7 +11829,7 @@
       </p:cxnSp>
       <p:sp>
         <p:nvSpPr>
-          <p:cNvPr name="GraphCompose Table Cell Text" id="177"/>
+          <p:cNvPr name="GraphCompose Table Cell Text" id="178"/>
           <p:cNvSpPr txBox="true"/>
           <p:nvPr/>
         </p:nvSpPr>
@@ -9607,7 +11866,7 @@
       </p:sp>
       <p:cxnSp>
         <p:nvCxnSpPr>
-          <p:cNvPr name="GraphCompose Table Cell Border" id="178"/>
+          <p:cNvPr name="GraphCompose Table Cell Border" id="179"/>
           <p:cNvCxnSpPr/>
           <p:nvPr/>
         </p:nvCxnSpPr>
@@ -9628,7 +11887,7 @@
       </p:cxnSp>
       <p:cxnSp>
         <p:nvCxnSpPr>
-          <p:cNvPr name="GraphCompose Table Cell Border" id="179"/>
+          <p:cNvPr name="GraphCompose Table Cell Border" id="180"/>
           <p:cNvCxnSpPr/>
           <p:nvPr/>
         </p:nvCxnSpPr>
@@ -9649,7 +11908,7 @@
       </p:cxnSp>
       <p:sp>
         <p:nvSpPr>
-          <p:cNvPr name="GraphCompose Table Cell Text" id="180"/>
+          <p:cNvPr name="GraphCompose Table Cell Text" id="181"/>
           <p:cNvSpPr txBox="true"/>
           <p:nvPr/>
         </p:nvSpPr>
@@ -9686,7 +11945,7 @@
       </p:sp>
       <p:cxnSp>
         <p:nvCxnSpPr>
-          <p:cNvPr name="GraphCompose Table Cell Border" id="181"/>
+          <p:cNvPr name="GraphCompose Table Cell Border" id="182"/>
           <p:cNvCxnSpPr/>
           <p:nvPr/>
         </p:nvCxnSpPr>
@@ -9707,7 +11966,7 @@
       </p:cxnSp>
       <p:cxnSp>
         <p:nvCxnSpPr>
-          <p:cNvPr name="GraphCompose Table Cell Border" id="182"/>
+          <p:cNvPr name="GraphCompose Table Cell Border" id="183"/>
           <p:cNvCxnSpPr/>
           <p:nvPr/>
         </p:nvCxnSpPr>
@@ -9728,7 +11987,7 @@
       </p:cxnSp>
       <p:sp>
         <p:nvSpPr>
-          <p:cNvPr name="GraphCompose Table Cell Text" id="183"/>
+          <p:cNvPr name="GraphCompose Table Cell Text" id="184"/>
           <p:cNvSpPr txBox="true"/>
           <p:nvPr/>
         </p:nvSpPr>
@@ -9765,7 +12024,7 @@
       </p:sp>
       <p:cxnSp>
         <p:nvCxnSpPr>
-          <p:cNvPr name="GraphCompose Table Cell Border" id="184"/>
+          <p:cNvPr name="GraphCompose Table Cell Border" id="185"/>
           <p:cNvCxnSpPr/>
           <p:nvPr/>
         </p:nvCxnSpPr>
@@ -9786,7 +12045,7 @@
       </p:cxnSp>
       <p:cxnSp>
         <p:nvCxnSpPr>
-          <p:cNvPr name="GraphCompose Table Cell Border" id="185"/>
+          <p:cNvPr name="GraphCompose Table Cell Border" id="186"/>
           <p:cNvCxnSpPr/>
           <p:nvPr/>
         </p:nvCxnSpPr>
@@ -9807,7 +12066,7 @@
       </p:cxnSp>
       <p:cxnSp>
         <p:nvCxnSpPr>
-          <p:cNvPr name="GraphCompose Table Cell Border" id="186"/>
+          <p:cNvPr name="GraphCompose Table Cell Border" id="187"/>
           <p:cNvCxnSpPr/>
           <p:nvPr/>
         </p:nvCxnSpPr>
@@ -9828,7 +12087,7 @@
       </p:cxnSp>
       <p:sp>
         <p:nvSpPr>
-          <p:cNvPr name="GraphCompose Table Cell Text" id="187"/>
+          <p:cNvPr name="GraphCompose Table Cell Text" id="188"/>
           <p:cNvSpPr txBox="true"/>
           <p:nvPr/>
         </p:nvSpPr>
@@ -9865,7 +12124,7 @@
       </p:sp>
       <p:cxnSp>
         <p:nvCxnSpPr>
-          <p:cNvPr name="GraphCompose Table Cell Border" id="188"/>
+          <p:cNvPr name="GraphCompose Table Cell Border" id="189"/>
           <p:cNvCxnSpPr/>
           <p:nvPr/>
         </p:nvCxnSpPr>
@@ -9886,7 +12145,7 @@
       </p:cxnSp>
       <p:cxnSp>
         <p:nvCxnSpPr>
-          <p:cNvPr name="GraphCompose Table Cell Border" id="189"/>
+          <p:cNvPr name="GraphCompose Table Cell Border" id="190"/>
           <p:cNvCxnSpPr/>
           <p:nvPr/>
         </p:nvCxnSpPr>
@@ -9907,7 +12166,7 @@
       </p:cxnSp>
       <p:sp>
         <p:nvSpPr>
-          <p:cNvPr name="GraphCompose Table Cell Text" id="190"/>
+          <p:cNvPr name="GraphCompose Table Cell Text" id="191"/>
           <p:cNvSpPr txBox="true"/>
           <p:nvPr/>
         </p:nvSpPr>
@@ -9944,7 +12203,7 @@
       </p:sp>
       <p:cxnSp>
         <p:nvCxnSpPr>
-          <p:cNvPr name="GraphCompose Table Cell Border" id="191"/>
+          <p:cNvPr name="GraphCompose Table Cell Border" id="192"/>
           <p:cNvCxnSpPr/>
           <p:nvPr/>
         </p:nvCxnSpPr>
@@ -9965,7 +12224,7 @@
       </p:cxnSp>
       <p:cxnSp>
         <p:nvCxnSpPr>
-          <p:cNvPr name="GraphCompose Table Cell Border" id="192"/>
+          <p:cNvPr name="GraphCompose Table Cell Border" id="193"/>
           <p:cNvCxnSpPr/>
           <p:nvPr/>
         </p:nvCxnSpPr>
@@ -9986,7 +12245,7 @@
       </p:cxnSp>
       <p:sp>
         <p:nvSpPr>
-          <p:cNvPr name="GraphCompose Table Cell Text" id="193"/>
+          <p:cNvPr name="GraphCompose Table Cell Text" id="194"/>
           <p:cNvSpPr txBox="true"/>
           <p:nvPr/>
         </p:nvSpPr>
@@ -10023,7 +12282,7 @@
       </p:sp>
       <p:cxnSp>
         <p:nvCxnSpPr>
-          <p:cNvPr name="GraphCompose Table Cell Border" id="194"/>
+          <p:cNvPr name="GraphCompose Table Cell Border" id="195"/>
           <p:cNvCxnSpPr/>
           <p:nvPr/>
         </p:nvCxnSpPr>
@@ -10044,7 +12303,7 @@
       </p:cxnSp>
       <p:cxnSp>
         <p:nvCxnSpPr>
-          <p:cNvPr name="GraphCompose Table Cell Border" id="195"/>
+          <p:cNvPr name="GraphCompose Table Cell Border" id="196"/>
           <p:cNvCxnSpPr/>
           <p:nvPr/>
         </p:nvCxnSpPr>
@@ -10065,7 +12324,7 @@
       </p:cxnSp>
       <p:sp>
         <p:nvSpPr>
-          <p:cNvPr name="GraphCompose Table Cell Text" id="196"/>
+          <p:cNvPr name="GraphCompose Table Cell Text" id="197"/>
           <p:cNvSpPr txBox="true"/>
           <p:nvPr/>
         </p:nvSpPr>
@@ -10102,7 +12361,7 @@
       </p:sp>
       <p:cxnSp>
         <p:nvCxnSpPr>
-          <p:cNvPr name="GraphCompose Table Cell Border" id="197"/>
+          <p:cNvPr name="GraphCompose Table Cell Border" id="198"/>
           <p:cNvCxnSpPr/>
           <p:nvPr/>
         </p:nvCxnSpPr>
@@ -10123,7 +12382,7 @@
       </p:cxnSp>
       <p:cxnSp>
         <p:nvCxnSpPr>
-          <p:cNvPr name="GraphCompose Table Cell Border" id="198"/>
+          <p:cNvPr name="GraphCompose Table Cell Border" id="199"/>
           <p:cNvCxnSpPr/>
           <p:nvPr/>
         </p:nvCxnSpPr>
@@ -10144,7 +12403,7 @@
       </p:cxnSp>
       <p:sp>
         <p:nvSpPr>
-          <p:cNvPr name="GraphCompose Table Cell Text" id="199"/>
+          <p:cNvPr name="GraphCompose Table Cell Text" id="200"/>
           <p:cNvSpPr txBox="true"/>
           <p:nvPr/>
         </p:nvSpPr>
@@ -10181,7 +12440,7 @@
       </p:sp>
       <p:cxnSp>
         <p:nvCxnSpPr>
-          <p:cNvPr name="GraphCompose Table Cell Border" id="200"/>
+          <p:cNvPr name="GraphCompose Table Cell Border" id="201"/>
           <p:cNvCxnSpPr/>
           <p:nvPr/>
         </p:nvCxnSpPr>
@@ -10202,7 +12461,7 @@
       </p:cxnSp>
       <p:cxnSp>
         <p:nvCxnSpPr>
-          <p:cNvPr name="GraphCompose Table Cell Border" id="201"/>
+          <p:cNvPr name="GraphCompose Table Cell Border" id="202"/>
           <p:cNvCxnSpPr/>
           <p:nvPr/>
         </p:nvCxnSpPr>
@@ -10223,7 +12482,7 @@
       </p:cxnSp>
       <p:cxnSp>
         <p:nvCxnSpPr>
-          <p:cNvPr name="GraphCompose Table Cell Border" id="202"/>
+          <p:cNvPr name="GraphCompose Table Cell Border" id="203"/>
           <p:cNvCxnSpPr/>
           <p:nvPr/>
         </p:nvCxnSpPr>
@@ -10244,7 +12503,7 @@
       </p:cxnSp>
       <p:sp>
         <p:nvSpPr>
-          <p:cNvPr name="GraphCompose Table Cell Text" id="203"/>
+          <p:cNvPr name="GraphCompose Table Cell Text" id="204"/>
           <p:cNvSpPr txBox="true"/>
           <p:nvPr/>
         </p:nvSpPr>
@@ -10281,7 +12540,7 @@
       </p:sp>
       <p:cxnSp>
         <p:nvCxnSpPr>
-          <p:cNvPr name="GraphCompose Table Cell Border" id="204"/>
+          <p:cNvPr name="GraphCompose Table Cell Border" id="205"/>
           <p:cNvCxnSpPr/>
           <p:nvPr/>
         </p:nvCxnSpPr>
@@ -10302,7 +12561,7 @@
       </p:cxnSp>
       <p:cxnSp>
         <p:nvCxnSpPr>
-          <p:cNvPr name="GraphCompose Table Cell Border" id="205"/>
+          <p:cNvPr name="GraphCompose Table Cell Border" id="206"/>
           <p:cNvCxnSpPr/>
           <p:nvPr/>
         </p:nvCxnSpPr>
@@ -10323,7 +12582,7 @@
       </p:cxnSp>
       <p:sp>
         <p:nvSpPr>
-          <p:cNvPr name="GraphCompose Table Cell Text" id="206"/>
+          <p:cNvPr name="GraphCompose Table Cell Text" id="207"/>
           <p:cNvSpPr txBox="true"/>
           <p:nvPr/>
         </p:nvSpPr>
@@ -10360,7 +12619,7 @@
       </p:sp>
       <p:cxnSp>
         <p:nvCxnSpPr>
-          <p:cNvPr name="GraphCompose Table Cell Border" id="207"/>
+          <p:cNvPr name="GraphCompose Table Cell Border" id="208"/>
           <p:cNvCxnSpPr/>
           <p:nvPr/>
         </p:nvCxnSpPr>
@@ -10381,7 +12640,7 @@
       </p:cxnSp>
       <p:cxnSp>
         <p:nvCxnSpPr>
-          <p:cNvPr name="GraphCompose Table Cell Border" id="208"/>
+          <p:cNvPr name="GraphCompose Table Cell Border" id="209"/>
           <p:cNvCxnSpPr/>
           <p:nvPr/>
         </p:nvCxnSpPr>
@@ -10402,7 +12661,7 @@
       </p:cxnSp>
       <p:sp>
         <p:nvSpPr>
-          <p:cNvPr name="GraphCompose Table Cell Text" id="209"/>
+          <p:cNvPr name="GraphCompose Table Cell Text" id="210"/>
           <p:cNvSpPr txBox="true"/>
           <p:nvPr/>
         </p:nvSpPr>
@@ -10439,7 +12698,7 @@
       </p:sp>
       <p:cxnSp>
         <p:nvCxnSpPr>
-          <p:cNvPr name="GraphCompose Table Cell Border" id="210"/>
+          <p:cNvPr name="GraphCompose Table Cell Border" id="211"/>
           <p:cNvCxnSpPr/>
           <p:nvPr/>
         </p:nvCxnSpPr>
@@ -10460,7 +12719,7 @@
       </p:cxnSp>
       <p:cxnSp>
         <p:nvCxnSpPr>
-          <p:cNvPr name="GraphCompose Table Cell Border" id="211"/>
+          <p:cNvPr name="GraphCompose Table Cell Border" id="212"/>
           <p:cNvCxnSpPr/>
           <p:nvPr/>
         </p:nvCxnSpPr>
@@ -10481,7 +12740,7 @@
       </p:cxnSp>
       <p:sp>
         <p:nvSpPr>
-          <p:cNvPr name="GraphCompose Table Cell Text" id="212"/>
+          <p:cNvPr name="GraphCompose Table Cell Text" id="213"/>
           <p:cNvSpPr txBox="true"/>
           <p:nvPr/>
         </p:nvSpPr>
@@ -10518,7 +12777,7 @@
       </p:sp>
       <p:cxnSp>
         <p:nvCxnSpPr>
-          <p:cNvPr name="GraphCompose Table Cell Border" id="213"/>
+          <p:cNvPr name="GraphCompose Table Cell Border" id="214"/>
           <p:cNvCxnSpPr/>
           <p:nvPr/>
         </p:nvCxnSpPr>
@@ -10539,7 +12798,7 @@
       </p:cxnSp>
       <p:cxnSp>
         <p:nvCxnSpPr>
-          <p:cNvPr name="GraphCompose Table Cell Border" id="214"/>
+          <p:cNvPr name="GraphCompose Table Cell Border" id="215"/>
           <p:cNvCxnSpPr/>
           <p:nvPr/>
         </p:nvCxnSpPr>
@@ -10560,7 +12819,7 @@
       </p:cxnSp>
       <p:sp>
         <p:nvSpPr>
-          <p:cNvPr name="GraphCompose Table Cell Text" id="215"/>
+          <p:cNvPr name="GraphCompose Table Cell Text" id="216"/>
           <p:cNvSpPr txBox="true"/>
           <p:nvPr/>
         </p:nvSpPr>
@@ -10597,7 +12856,7 @@
       </p:sp>
       <p:sp>
         <p:nvSpPr>
-          <p:cNvPr name="GraphCompose Header" id="216"/>
+          <p:cNvPr name="GraphCompose Header" id="217"/>
           <p:cNvSpPr txBox="true"/>
           <p:nvPr/>
         </p:nvSpPr>
@@ -10634,7 +12893,7 @@
       </p:sp>
       <p:sp>
         <p:nvSpPr>
-          <p:cNvPr name="GraphCompose Header" id="217"/>
+          <p:cNvPr name="GraphCompose Header" id="218"/>
           <p:cNvSpPr txBox="true"/>
           <p:nvPr/>
         </p:nvSpPr>
@@ -10671,7 +12930,7 @@
       </p:sp>
       <p:cxnSp>
         <p:nvCxnSpPr>
-          <p:cNvPr name="GraphCompose Header Separator" id="218"/>
+          <p:cNvPr name="GraphCompose Header Separator" id="219"/>
           <p:cNvCxnSpPr/>
           <p:nvPr/>
         </p:nvCxnSpPr>
@@ -10692,7 +12951,7 @@
       </p:cxnSp>
       <p:sp>
         <p:nvSpPr>
-          <p:cNvPr name="GraphCompose Footer" id="219"/>
+          <p:cNvPr name="GraphCompose Footer" id="220"/>
           <p:cNvSpPr txBox="true"/>
           <p:nvPr/>
         </p:nvSpPr>
@@ -10729,7 +12988,7 @@
       </p:sp>
       <p:sp>
         <p:nvSpPr>
-          <p:cNvPr name="GraphCompose Footer" id="220"/>
+          <p:cNvPr name="GraphCompose Footer" id="221"/>
           <p:cNvSpPr txBox="true"/>
           <p:nvPr/>
         </p:nvSpPr>
@@ -10766,7 +13025,7 @@
       </p:sp>
       <p:cxnSp>
         <p:nvCxnSpPr>
-          <p:cNvPr name="GraphCompose Footer Separator" id="221"/>
+          <p:cNvPr name="GraphCompose Footer Separator" id="222"/>
           <p:cNvCxnSpPr/>
           <p:nvPr/>
         </p:nvCxnSpPr>
@@ -10794,7 +13053,7 @@
 </file>
 
 <file path=ppt/slides/slide2.xml><?xml version="1.0" encoding="utf-8"?>
-<p:sld xmlns:p="http://schemas.openxmlformats.org/presentationml/2006/main" xmlns:a="http://schemas.openxmlformats.org/drawingml/2006/main" xmlns:r="http://schemas.openxmlformats.org/officeDocument/2006/relationships">
+<p:sld xmlns:p="http://schemas.openxmlformats.org/presentationml/2006/main" xmlns:a="http://schemas.openxmlformats.org/drawingml/2006/main">
   <p:cSld>
     <p:spTree>
       <p:nvGrpSpPr>
@@ -23220,33 +25479,836 @@
           </a:p>
         </p:txBody>
       </p:sp>
-      <p:pic>
-        <p:nvPicPr>
-          <p:cNvPr name="Picture 443" id="443"/>
-          <p:cNvPicPr>
-            <a:picLocks noChangeAspect="true"/>
-          </p:cNvPicPr>
-          <p:nvPr/>
-        </p:nvPicPr>
-        <p:blipFill>
-          <a:blip r:embed="rId2"/>
-          <a:stretch>
-            <a:fillRect/>
-          </a:stretch>
-        </p:blipFill>
+      <p:sp>
+        <p:nvSpPr>
+          <p:cNvPr name="Freeform 443" id="443"/>
+          <p:cNvSpPr/>
+          <p:nvPr/>
+        </p:nvSpPr>
         <p:spPr>
           <a:xfrm>
             <a:off x="4955334" y="9560255"/>
             <a:ext cx="2286000" cy="457200"/>
           </a:xfrm>
-          <a:prstGeom prst="rect">
-            <a:avLst/>
-          </a:prstGeom>
-        </p:spPr>
-      </p:pic>
-      <p:sp>
-        <p:nvSpPr>
-          <p:cNvPr name="GraphCompose Header" id="444"/>
+          <a:custGeom>
+            <a:avLst/>
+            <a:gdLst/>
+            <a:ahLst/>
+            <a:cxnLst/>
+            <a:rect r="r" b="b" t="t" l="l"/>
+            <a:pathLst>
+              <a:path h="457200" w="2286000">
+                <a:moveTo>
+                  <a:pt x="0" y="0"/>
+                </a:moveTo>
+                <a:lnTo>
+                  <a:pt x="2286000" y="0"/>
+                </a:lnTo>
+                <a:lnTo>
+                  <a:pt x="2286000" y="457200"/>
+                </a:lnTo>
+                <a:lnTo>
+                  <a:pt x="0" y="457200"/>
+                </a:lnTo>
+                <a:close/>
+              </a:path>
+            </a:pathLst>
+          </a:custGeom>
+          <a:solidFill>
+            <a:srgbClr val="FFFFFF"/>
+          </a:solidFill>
+          <a:ln>
+            <a:noFill/>
+          </a:ln>
+        </p:spPr>
+      </p:sp>
+      <p:sp>
+        <p:nvSpPr>
+          <p:cNvPr name="Freeform 444" id="444"/>
+          <p:cNvSpPr/>
+          <p:nvPr/>
+        </p:nvSpPr>
+        <p:spPr>
+          <a:xfrm>
+            <a:off x="5425234" y="9560255"/>
+            <a:ext cx="1339850" cy="457200"/>
+          </a:xfrm>
+          <a:custGeom>
+            <a:avLst/>
+            <a:gdLst/>
+            <a:ahLst/>
+            <a:cxnLst/>
+            <a:rect r="r" b="b" t="t" l="l"/>
+            <a:pathLst>
+              <a:path h="457200" w="1339850">
+                <a:moveTo>
+                  <a:pt x="0" y="0"/>
+                </a:moveTo>
+                <a:lnTo>
+                  <a:pt x="12700" y="0"/>
+                </a:lnTo>
+                <a:lnTo>
+                  <a:pt x="12700" y="457200"/>
+                </a:lnTo>
+                <a:lnTo>
+                  <a:pt x="0" y="457200"/>
+                </a:lnTo>
+                <a:close/>
+                <a:moveTo>
+                  <a:pt x="19050" y="0"/>
+                </a:moveTo>
+                <a:lnTo>
+                  <a:pt x="25400" y="0"/>
+                </a:lnTo>
+                <a:lnTo>
+                  <a:pt x="25400" y="457200"/>
+                </a:lnTo>
+                <a:lnTo>
+                  <a:pt x="19050" y="457200"/>
+                </a:lnTo>
+                <a:close/>
+                <a:moveTo>
+                  <a:pt x="38100" y="0"/>
+                </a:moveTo>
+                <a:lnTo>
+                  <a:pt x="44450" y="0"/>
+                </a:lnTo>
+                <a:lnTo>
+                  <a:pt x="44450" y="457200"/>
+                </a:lnTo>
+                <a:lnTo>
+                  <a:pt x="38100" y="457200"/>
+                </a:lnTo>
+                <a:close/>
+                <a:moveTo>
+                  <a:pt x="69850" y="0"/>
+                </a:moveTo>
+                <a:lnTo>
+                  <a:pt x="82550" y="0"/>
+                </a:lnTo>
+                <a:lnTo>
+                  <a:pt x="82550" y="457200"/>
+                </a:lnTo>
+                <a:lnTo>
+                  <a:pt x="69850" y="457200"/>
+                </a:lnTo>
+                <a:close/>
+                <a:moveTo>
+                  <a:pt x="88900" y="0"/>
+                </a:moveTo>
+                <a:lnTo>
+                  <a:pt x="95250" y="0"/>
+                </a:lnTo>
+                <a:lnTo>
+                  <a:pt x="95250" y="457200"/>
+                </a:lnTo>
+                <a:lnTo>
+                  <a:pt x="88900" y="457200"/>
+                </a:lnTo>
+                <a:close/>
+                <a:moveTo>
+                  <a:pt x="114300" y="0"/>
+                </a:moveTo>
+                <a:lnTo>
+                  <a:pt x="120650" y="0"/>
+                </a:lnTo>
+                <a:lnTo>
+                  <a:pt x="120650" y="457200"/>
+                </a:lnTo>
+                <a:lnTo>
+                  <a:pt x="114300" y="457200"/>
+                </a:lnTo>
+                <a:close/>
+                <a:moveTo>
+                  <a:pt x="139700" y="0"/>
+                </a:moveTo>
+                <a:lnTo>
+                  <a:pt x="146050" y="0"/>
+                </a:lnTo>
+                <a:lnTo>
+                  <a:pt x="146050" y="457200"/>
+                </a:lnTo>
+                <a:lnTo>
+                  <a:pt x="139700" y="457200"/>
+                </a:lnTo>
+                <a:close/>
+                <a:moveTo>
+                  <a:pt x="165100" y="0"/>
+                </a:moveTo>
+                <a:lnTo>
+                  <a:pt x="171450" y="0"/>
+                </a:lnTo>
+                <a:lnTo>
+                  <a:pt x="171450" y="457200"/>
+                </a:lnTo>
+                <a:lnTo>
+                  <a:pt x="165100" y="457200"/>
+                </a:lnTo>
+                <a:close/>
+                <a:moveTo>
+                  <a:pt x="190500" y="0"/>
+                </a:moveTo>
+                <a:lnTo>
+                  <a:pt x="203200" y="0"/>
+                </a:lnTo>
+                <a:lnTo>
+                  <a:pt x="203200" y="457200"/>
+                </a:lnTo>
+                <a:lnTo>
+                  <a:pt x="190500" y="457200"/>
+                </a:lnTo>
+                <a:close/>
+                <a:moveTo>
+                  <a:pt x="209550" y="0"/>
+                </a:moveTo>
+                <a:lnTo>
+                  <a:pt x="215900" y="0"/>
+                </a:lnTo>
+                <a:lnTo>
+                  <a:pt x="215900" y="457200"/>
+                </a:lnTo>
+                <a:lnTo>
+                  <a:pt x="209550" y="457200"/>
+                </a:lnTo>
+                <a:close/>
+                <a:moveTo>
+                  <a:pt x="228600" y="0"/>
+                </a:moveTo>
+                <a:lnTo>
+                  <a:pt x="241300" y="0"/>
+                </a:lnTo>
+                <a:lnTo>
+                  <a:pt x="241300" y="457200"/>
+                </a:lnTo>
+                <a:lnTo>
+                  <a:pt x="228600" y="457200"/>
+                </a:lnTo>
+                <a:close/>
+                <a:moveTo>
+                  <a:pt x="247650" y="0"/>
+                </a:moveTo>
+                <a:lnTo>
+                  <a:pt x="266700" y="0"/>
+                </a:lnTo>
+                <a:lnTo>
+                  <a:pt x="266700" y="457200"/>
+                </a:lnTo>
+                <a:lnTo>
+                  <a:pt x="247650" y="457200"/>
+                </a:lnTo>
+                <a:close/>
+                <a:moveTo>
+                  <a:pt x="279400" y="0"/>
+                </a:moveTo>
+                <a:lnTo>
+                  <a:pt x="285750" y="0"/>
+                </a:lnTo>
+                <a:lnTo>
+                  <a:pt x="285750" y="457200"/>
+                </a:lnTo>
+                <a:lnTo>
+                  <a:pt x="279400" y="457200"/>
+                </a:lnTo>
+                <a:close/>
+                <a:moveTo>
+                  <a:pt x="292100" y="0"/>
+                </a:moveTo>
+                <a:lnTo>
+                  <a:pt x="311150" y="0"/>
+                </a:lnTo>
+                <a:lnTo>
+                  <a:pt x="311150" y="457200"/>
+                </a:lnTo>
+                <a:lnTo>
+                  <a:pt x="292100" y="457200"/>
+                </a:lnTo>
+                <a:close/>
+                <a:moveTo>
+                  <a:pt x="317500" y="0"/>
+                </a:moveTo>
+                <a:lnTo>
+                  <a:pt x="330200" y="0"/>
+                </a:lnTo>
+                <a:lnTo>
+                  <a:pt x="330200" y="457200"/>
+                </a:lnTo>
+                <a:lnTo>
+                  <a:pt x="317500" y="457200"/>
+                </a:lnTo>
+                <a:close/>
+                <a:moveTo>
+                  <a:pt x="349250" y="0"/>
+                </a:moveTo>
+                <a:lnTo>
+                  <a:pt x="355600" y="0"/>
+                </a:lnTo>
+                <a:lnTo>
+                  <a:pt x="355600" y="457200"/>
+                </a:lnTo>
+                <a:lnTo>
+                  <a:pt x="349250" y="457200"/>
+                </a:lnTo>
+                <a:close/>
+                <a:moveTo>
+                  <a:pt x="361950" y="0"/>
+                </a:moveTo>
+                <a:lnTo>
+                  <a:pt x="368300" y="0"/>
+                </a:lnTo>
+                <a:lnTo>
+                  <a:pt x="368300" y="457200"/>
+                </a:lnTo>
+                <a:lnTo>
+                  <a:pt x="361950" y="457200"/>
+                </a:lnTo>
+                <a:close/>
+                <a:moveTo>
+                  <a:pt x="387350" y="0"/>
+                </a:moveTo>
+                <a:lnTo>
+                  <a:pt x="400050" y="0"/>
+                </a:lnTo>
+                <a:lnTo>
+                  <a:pt x="400050" y="457200"/>
+                </a:lnTo>
+                <a:lnTo>
+                  <a:pt x="387350" y="457200"/>
+                </a:lnTo>
+                <a:close/>
+                <a:moveTo>
+                  <a:pt x="419100" y="0"/>
+                </a:moveTo>
+                <a:lnTo>
+                  <a:pt x="431800" y="0"/>
+                </a:lnTo>
+                <a:lnTo>
+                  <a:pt x="431800" y="457200"/>
+                </a:lnTo>
+                <a:lnTo>
+                  <a:pt x="419100" y="457200"/>
+                </a:lnTo>
+                <a:close/>
+                <a:moveTo>
+                  <a:pt x="438150" y="0"/>
+                </a:moveTo>
+                <a:lnTo>
+                  <a:pt x="457200" y="0"/>
+                </a:lnTo>
+                <a:lnTo>
+                  <a:pt x="457200" y="457200"/>
+                </a:lnTo>
+                <a:lnTo>
+                  <a:pt x="438150" y="457200"/>
+                </a:lnTo>
+                <a:close/>
+                <a:moveTo>
+                  <a:pt x="463550" y="0"/>
+                </a:moveTo>
+                <a:lnTo>
+                  <a:pt x="469900" y="0"/>
+                </a:lnTo>
+                <a:lnTo>
+                  <a:pt x="469900" y="457200"/>
+                </a:lnTo>
+                <a:lnTo>
+                  <a:pt x="463550" y="457200"/>
+                </a:lnTo>
+                <a:close/>
+                <a:moveTo>
+                  <a:pt x="488950" y="0"/>
+                </a:moveTo>
+                <a:lnTo>
+                  <a:pt x="501650" y="0"/>
+                </a:lnTo>
+                <a:lnTo>
+                  <a:pt x="501650" y="457200"/>
+                </a:lnTo>
+                <a:lnTo>
+                  <a:pt x="488950" y="457200"/>
+                </a:lnTo>
+                <a:close/>
+                <a:moveTo>
+                  <a:pt x="508000" y="0"/>
+                </a:moveTo>
+                <a:lnTo>
+                  <a:pt x="527050" y="0"/>
+                </a:lnTo>
+                <a:lnTo>
+                  <a:pt x="527050" y="457200"/>
+                </a:lnTo>
+                <a:lnTo>
+                  <a:pt x="508000" y="457200"/>
+                </a:lnTo>
+                <a:close/>
+                <a:moveTo>
+                  <a:pt x="546100" y="0"/>
+                </a:moveTo>
+                <a:lnTo>
+                  <a:pt x="552450" y="0"/>
+                </a:lnTo>
+                <a:lnTo>
+                  <a:pt x="552450" y="457200"/>
+                </a:lnTo>
+                <a:lnTo>
+                  <a:pt x="546100" y="457200"/>
+                </a:lnTo>
+                <a:close/>
+                <a:moveTo>
+                  <a:pt x="558800" y="0"/>
+                </a:moveTo>
+                <a:lnTo>
+                  <a:pt x="565150" y="0"/>
+                </a:lnTo>
+                <a:lnTo>
+                  <a:pt x="565150" y="457200"/>
+                </a:lnTo>
+                <a:lnTo>
+                  <a:pt x="558800" y="457200"/>
+                </a:lnTo>
+                <a:close/>
+                <a:moveTo>
+                  <a:pt x="584200" y="0"/>
+                </a:moveTo>
+                <a:lnTo>
+                  <a:pt x="596900" y="0"/>
+                </a:lnTo>
+                <a:lnTo>
+                  <a:pt x="596900" y="457200"/>
+                </a:lnTo>
+                <a:lnTo>
+                  <a:pt x="584200" y="457200"/>
+                </a:lnTo>
+                <a:close/>
+                <a:moveTo>
+                  <a:pt x="603250" y="0"/>
+                </a:moveTo>
+                <a:lnTo>
+                  <a:pt x="609600" y="0"/>
+                </a:lnTo>
+                <a:lnTo>
+                  <a:pt x="609600" y="457200"/>
+                </a:lnTo>
+                <a:lnTo>
+                  <a:pt x="603250" y="457200"/>
+                </a:lnTo>
+                <a:close/>
+                <a:moveTo>
+                  <a:pt x="628650" y="0"/>
+                </a:moveTo>
+                <a:lnTo>
+                  <a:pt x="641350" y="0"/>
+                </a:lnTo>
+                <a:lnTo>
+                  <a:pt x="641350" y="457200"/>
+                </a:lnTo>
+                <a:lnTo>
+                  <a:pt x="628650" y="457200"/>
+                </a:lnTo>
+                <a:close/>
+                <a:moveTo>
+                  <a:pt x="660400" y="0"/>
+                </a:moveTo>
+                <a:lnTo>
+                  <a:pt x="666750" y="0"/>
+                </a:lnTo>
+                <a:lnTo>
+                  <a:pt x="666750" y="457200"/>
+                </a:lnTo>
+                <a:lnTo>
+                  <a:pt x="660400" y="457200"/>
+                </a:lnTo>
+                <a:close/>
+                <a:moveTo>
+                  <a:pt x="673100" y="0"/>
+                </a:moveTo>
+                <a:lnTo>
+                  <a:pt x="692150" y="0"/>
+                </a:lnTo>
+                <a:lnTo>
+                  <a:pt x="692150" y="457200"/>
+                </a:lnTo>
+                <a:lnTo>
+                  <a:pt x="673100" y="457200"/>
+                </a:lnTo>
+                <a:close/>
+                <a:moveTo>
+                  <a:pt x="698500" y="0"/>
+                </a:moveTo>
+                <a:lnTo>
+                  <a:pt x="704850" y="0"/>
+                </a:lnTo>
+                <a:lnTo>
+                  <a:pt x="704850" y="457200"/>
+                </a:lnTo>
+                <a:lnTo>
+                  <a:pt x="698500" y="457200"/>
+                </a:lnTo>
+                <a:close/>
+                <a:moveTo>
+                  <a:pt x="717550" y="0"/>
+                </a:moveTo>
+                <a:lnTo>
+                  <a:pt x="730250" y="0"/>
+                </a:lnTo>
+                <a:lnTo>
+                  <a:pt x="730250" y="457200"/>
+                </a:lnTo>
+                <a:lnTo>
+                  <a:pt x="717550" y="457200"/>
+                </a:lnTo>
+                <a:close/>
+                <a:moveTo>
+                  <a:pt x="736600" y="0"/>
+                </a:moveTo>
+                <a:lnTo>
+                  <a:pt x="755650" y="0"/>
+                </a:lnTo>
+                <a:lnTo>
+                  <a:pt x="755650" y="457200"/>
+                </a:lnTo>
+                <a:lnTo>
+                  <a:pt x="736600" y="457200"/>
+                </a:lnTo>
+                <a:close/>
+                <a:moveTo>
+                  <a:pt x="768350" y="0"/>
+                </a:moveTo>
+                <a:lnTo>
+                  <a:pt x="781050" y="0"/>
+                </a:lnTo>
+                <a:lnTo>
+                  <a:pt x="781050" y="457200"/>
+                </a:lnTo>
+                <a:lnTo>
+                  <a:pt x="768350" y="457200"/>
+                </a:lnTo>
+                <a:close/>
+                <a:moveTo>
+                  <a:pt x="787400" y="0"/>
+                </a:moveTo>
+                <a:lnTo>
+                  <a:pt x="806450" y="0"/>
+                </a:lnTo>
+                <a:lnTo>
+                  <a:pt x="806450" y="457200"/>
+                </a:lnTo>
+                <a:lnTo>
+                  <a:pt x="787400" y="457200"/>
+                </a:lnTo>
+                <a:close/>
+                <a:moveTo>
+                  <a:pt x="812800" y="0"/>
+                </a:moveTo>
+                <a:lnTo>
+                  <a:pt x="819150" y="0"/>
+                </a:lnTo>
+                <a:lnTo>
+                  <a:pt x="819150" y="457200"/>
+                </a:lnTo>
+                <a:lnTo>
+                  <a:pt x="812800" y="457200"/>
+                </a:lnTo>
+                <a:close/>
+                <a:moveTo>
+                  <a:pt x="838200" y="0"/>
+                </a:moveTo>
+                <a:lnTo>
+                  <a:pt x="844550" y="0"/>
+                </a:lnTo>
+                <a:lnTo>
+                  <a:pt x="844550" y="457200"/>
+                </a:lnTo>
+                <a:lnTo>
+                  <a:pt x="838200" y="457200"/>
+                </a:lnTo>
+                <a:close/>
+                <a:moveTo>
+                  <a:pt x="850900" y="0"/>
+                </a:moveTo>
+                <a:lnTo>
+                  <a:pt x="857250" y="0"/>
+                </a:lnTo>
+                <a:lnTo>
+                  <a:pt x="857250" y="457200"/>
+                </a:lnTo>
+                <a:lnTo>
+                  <a:pt x="850900" y="457200"/>
+                </a:lnTo>
+                <a:close/>
+                <a:moveTo>
+                  <a:pt x="876300" y="0"/>
+                </a:moveTo>
+                <a:lnTo>
+                  <a:pt x="889000" y="0"/>
+                </a:lnTo>
+                <a:lnTo>
+                  <a:pt x="889000" y="457200"/>
+                </a:lnTo>
+                <a:lnTo>
+                  <a:pt x="876300" y="457200"/>
+                </a:lnTo>
+                <a:close/>
+                <a:moveTo>
+                  <a:pt x="908050" y="0"/>
+                </a:moveTo>
+                <a:lnTo>
+                  <a:pt x="914400" y="0"/>
+                </a:lnTo>
+                <a:lnTo>
+                  <a:pt x="914400" y="457200"/>
+                </a:lnTo>
+                <a:lnTo>
+                  <a:pt x="908050" y="457200"/>
+                </a:lnTo>
+                <a:close/>
+                <a:moveTo>
+                  <a:pt x="920750" y="0"/>
+                </a:moveTo>
+                <a:lnTo>
+                  <a:pt x="939800" y="0"/>
+                </a:lnTo>
+                <a:lnTo>
+                  <a:pt x="939800" y="457200"/>
+                </a:lnTo>
+                <a:lnTo>
+                  <a:pt x="920750" y="457200"/>
+                </a:lnTo>
+                <a:close/>
+                <a:moveTo>
+                  <a:pt x="946150" y="0"/>
+                </a:moveTo>
+                <a:lnTo>
+                  <a:pt x="958850" y="0"/>
+                </a:lnTo>
+                <a:lnTo>
+                  <a:pt x="958850" y="457200"/>
+                </a:lnTo>
+                <a:lnTo>
+                  <a:pt x="946150" y="457200"/>
+                </a:lnTo>
+                <a:close/>
+                <a:moveTo>
+                  <a:pt x="977900" y="0"/>
+                </a:moveTo>
+                <a:lnTo>
+                  <a:pt x="996950" y="0"/>
+                </a:lnTo>
+                <a:lnTo>
+                  <a:pt x="996950" y="457200"/>
+                </a:lnTo>
+                <a:lnTo>
+                  <a:pt x="977900" y="457200"/>
+                </a:lnTo>
+                <a:close/>
+                <a:moveTo>
+                  <a:pt x="1003300" y="0"/>
+                </a:moveTo>
+                <a:lnTo>
+                  <a:pt x="1022350" y="0"/>
+                </a:lnTo>
+                <a:lnTo>
+                  <a:pt x="1022350" y="457200"/>
+                </a:lnTo>
+                <a:lnTo>
+                  <a:pt x="1003300" y="457200"/>
+                </a:lnTo>
+                <a:close/>
+                <a:moveTo>
+                  <a:pt x="1028700" y="0"/>
+                </a:moveTo>
+                <a:lnTo>
+                  <a:pt x="1041400" y="0"/>
+                </a:lnTo>
+                <a:lnTo>
+                  <a:pt x="1041400" y="457200"/>
+                </a:lnTo>
+                <a:lnTo>
+                  <a:pt x="1028700" y="457200"/>
+                </a:lnTo>
+                <a:close/>
+                <a:moveTo>
+                  <a:pt x="1047750" y="0"/>
+                </a:moveTo>
+                <a:lnTo>
+                  <a:pt x="1054100" y="0"/>
+                </a:lnTo>
+                <a:lnTo>
+                  <a:pt x="1054100" y="457200"/>
+                </a:lnTo>
+                <a:lnTo>
+                  <a:pt x="1047750" y="457200"/>
+                </a:lnTo>
+                <a:close/>
+                <a:moveTo>
+                  <a:pt x="1073150" y="0"/>
+                </a:moveTo>
+                <a:lnTo>
+                  <a:pt x="1085850" y="0"/>
+                </a:lnTo>
+                <a:lnTo>
+                  <a:pt x="1085850" y="457200"/>
+                </a:lnTo>
+                <a:lnTo>
+                  <a:pt x="1073150" y="457200"/>
+                </a:lnTo>
+                <a:close/>
+                <a:moveTo>
+                  <a:pt x="1092200" y="0"/>
+                </a:moveTo>
+                <a:lnTo>
+                  <a:pt x="1111250" y="0"/>
+                </a:lnTo>
+                <a:lnTo>
+                  <a:pt x="1111250" y="457200"/>
+                </a:lnTo>
+                <a:lnTo>
+                  <a:pt x="1092200" y="457200"/>
+                </a:lnTo>
+                <a:close/>
+                <a:moveTo>
+                  <a:pt x="1117600" y="0"/>
+                </a:moveTo>
+                <a:lnTo>
+                  <a:pt x="1123950" y="0"/>
+                </a:lnTo>
+                <a:lnTo>
+                  <a:pt x="1123950" y="457200"/>
+                </a:lnTo>
+                <a:lnTo>
+                  <a:pt x="1117600" y="457200"/>
+                </a:lnTo>
+                <a:close/>
+                <a:moveTo>
+                  <a:pt x="1143000" y="0"/>
+                </a:moveTo>
+                <a:lnTo>
+                  <a:pt x="1155700" y="0"/>
+                </a:lnTo>
+                <a:lnTo>
+                  <a:pt x="1155700" y="457200"/>
+                </a:lnTo>
+                <a:lnTo>
+                  <a:pt x="1143000" y="457200"/>
+                </a:lnTo>
+                <a:close/>
+                <a:moveTo>
+                  <a:pt x="1162050" y="0"/>
+                </a:moveTo>
+                <a:lnTo>
+                  <a:pt x="1168400" y="0"/>
+                </a:lnTo>
+                <a:lnTo>
+                  <a:pt x="1168400" y="457200"/>
+                </a:lnTo>
+                <a:lnTo>
+                  <a:pt x="1162050" y="457200"/>
+                </a:lnTo>
+                <a:close/>
+                <a:moveTo>
+                  <a:pt x="1187450" y="0"/>
+                </a:moveTo>
+                <a:lnTo>
+                  <a:pt x="1193800" y="0"/>
+                </a:lnTo>
+                <a:lnTo>
+                  <a:pt x="1193800" y="457200"/>
+                </a:lnTo>
+                <a:lnTo>
+                  <a:pt x="1187450" y="457200"/>
+                </a:lnTo>
+                <a:close/>
+                <a:moveTo>
+                  <a:pt x="1212850" y="0"/>
+                </a:moveTo>
+                <a:lnTo>
+                  <a:pt x="1231900" y="0"/>
+                </a:lnTo>
+                <a:lnTo>
+                  <a:pt x="1231900" y="457200"/>
+                </a:lnTo>
+                <a:lnTo>
+                  <a:pt x="1212850" y="457200"/>
+                </a:lnTo>
+                <a:close/>
+                <a:moveTo>
+                  <a:pt x="1238250" y="0"/>
+                </a:moveTo>
+                <a:lnTo>
+                  <a:pt x="1250950" y="0"/>
+                </a:lnTo>
+                <a:lnTo>
+                  <a:pt x="1250950" y="457200"/>
+                </a:lnTo>
+                <a:lnTo>
+                  <a:pt x="1238250" y="457200"/>
+                </a:lnTo>
+                <a:close/>
+                <a:moveTo>
+                  <a:pt x="1257300" y="0"/>
+                </a:moveTo>
+                <a:lnTo>
+                  <a:pt x="1270000" y="0"/>
+                </a:lnTo>
+                <a:lnTo>
+                  <a:pt x="1270000" y="457200"/>
+                </a:lnTo>
+                <a:lnTo>
+                  <a:pt x="1257300" y="457200"/>
+                </a:lnTo>
+                <a:close/>
+                <a:moveTo>
+                  <a:pt x="1289050" y="0"/>
+                </a:moveTo>
+                <a:lnTo>
+                  <a:pt x="1308100" y="0"/>
+                </a:lnTo>
+                <a:lnTo>
+                  <a:pt x="1308100" y="457200"/>
+                </a:lnTo>
+                <a:lnTo>
+                  <a:pt x="1289050" y="457200"/>
+                </a:lnTo>
+                <a:close/>
+                <a:moveTo>
+                  <a:pt x="1314450" y="0"/>
+                </a:moveTo>
+                <a:lnTo>
+                  <a:pt x="1320800" y="0"/>
+                </a:lnTo>
+                <a:lnTo>
+                  <a:pt x="1320800" y="457200"/>
+                </a:lnTo>
+                <a:lnTo>
+                  <a:pt x="1314450" y="457200"/>
+                </a:lnTo>
+                <a:close/>
+                <a:moveTo>
+                  <a:pt x="1327150" y="0"/>
+                </a:moveTo>
+                <a:lnTo>
+                  <a:pt x="1339850" y="0"/>
+                </a:lnTo>
+                <a:lnTo>
+                  <a:pt x="1339850" y="457200"/>
+                </a:lnTo>
+                <a:lnTo>
+                  <a:pt x="1327150" y="457200"/>
+                </a:lnTo>
+                <a:close/>
+              </a:path>
+            </a:pathLst>
+          </a:custGeom>
+          <a:solidFill>
+            <a:srgbClr val="14505F"/>
+          </a:solidFill>
+          <a:ln>
+            <a:noFill/>
+          </a:ln>
+        </p:spPr>
+      </p:sp>
+      <p:sp>
+        <p:nvSpPr>
+          <p:cNvPr name="GraphCompose Header" id="445"/>
           <p:cNvSpPr txBox="true"/>
           <p:nvPr/>
         </p:nvSpPr>
@@ -23283,7 +26345,7 @@
       </p:sp>
       <p:sp>
         <p:nvSpPr>
-          <p:cNvPr name="GraphCompose Header" id="445"/>
+          <p:cNvPr name="GraphCompose Header" id="446"/>
           <p:cNvSpPr txBox="true"/>
           <p:nvPr/>
         </p:nvSpPr>
@@ -23320,7 +26382,7 @@
       </p:sp>
       <p:cxnSp>
         <p:nvCxnSpPr>
-          <p:cNvPr name="GraphCompose Header Separator" id="446"/>
+          <p:cNvPr name="GraphCompose Header Separator" id="447"/>
           <p:cNvCxnSpPr/>
           <p:nvPr/>
         </p:nvCxnSpPr>
@@ -23341,7 +26403,7 @@
       </p:cxnSp>
       <p:sp>
         <p:nvSpPr>
-          <p:cNvPr name="GraphCompose Footer" id="447"/>
+          <p:cNvPr name="GraphCompose Footer" id="448"/>
           <p:cNvSpPr txBox="true"/>
           <p:nvPr/>
         </p:nvSpPr>
@@ -23378,7 +26440,7 @@
       </p:sp>
       <p:sp>
         <p:nvSpPr>
-          <p:cNvPr name="GraphCompose Footer" id="448"/>
+          <p:cNvPr name="GraphCompose Footer" id="449"/>
           <p:cNvSpPr txBox="true"/>
           <p:nvPr/>
         </p:nvSpPr>
@@ -23415,7 +26477,7 @@
       </p:sp>
       <p:cxnSp>
         <p:nvCxnSpPr>
-          <p:cNvPr name="GraphCompose Footer Separator" id="449"/>
+          <p:cNvPr name="GraphCompose Footer Separator" id="450"/>
           <p:cNvCxnSpPr/>
           <p:nvPr/>
         </p:nvCxnSpPr>
